--- a/docs/Conciliacion-Presentacion.pptx
+++ b/docs/Conciliacion-Presentacion.pptx
@@ -14,6 +14,7 @@
     <p:sldId id="262" r:id="rId13"/>
     <p:sldId id="263" r:id="rId14"/>
     <p:sldId id="264" r:id="rId15"/>
+    <p:sldId id="265" r:id="rId16"/>
   </p:sldIdLst>
   <p:sldSz cx="12191695" cy="6858000" type="screen4x3"/>
   <p:notesSz cx="6858000" cy="9144000"/>
@@ -3301,6 +3302,543 @@
                 <a:latin typeface="Segoe UI"/>
               </a:rPr>
               <a:t>Reto de conciliación · Historias #30 a #34</a:t>
+            </a:r>
+          </a:p>
+        </p:txBody>
+      </p:sp>
+    </p:spTree>
+  </p:cSld>
+  <p:clrMapOvr>
+    <a:masterClrMapping/>
+  </p:clrMapOvr>
+</p:sld>
+</file>
+
+<file path=ppt/slides/slide10.xml><?xml version="1.0" encoding="utf-8"?>
+<p:sld xmlns:a="http://schemas.openxmlformats.org/drawingml/2006/main" xmlns:p="http://schemas.openxmlformats.org/presentationml/2006/main" xmlns:r="http://schemas.openxmlformats.org/officeDocument/2006/relationships">
+  <p:cSld>
+    <p:spTree>
+      <p:nvGrpSpPr>
+        <p:cNvPr id="1" name=""/>
+        <p:cNvGrpSpPr/>
+        <p:nvPr/>
+      </p:nvGrpSpPr>
+      <p:grpSpPr/>
+      <p:sp>
+        <p:nvSpPr>
+          <p:cNvPr id="2" name="Rectangle 1"/>
+          <p:cNvSpPr/>
+          <p:nvPr/>
+        </p:nvSpPr>
+        <p:spPr>
+          <a:xfrm>
+            <a:off x="0" y="0"/>
+            <a:ext cx="12191695" cy="1051560"/>
+          </a:xfrm>
+          <a:prstGeom prst="rect">
+            <a:avLst/>
+          </a:prstGeom>
+          <a:solidFill>
+            <a:srgbClr val="0B1F3A"/>
+          </a:solidFill>
+          <a:ln>
+            <a:noFill/>
+          </a:ln>
+          <a:effectLst/>
+        </p:spPr>
+        <p:style>
+          <a:lnRef idx="1">
+            <a:schemeClr val="accent1"/>
+          </a:lnRef>
+          <a:fillRef idx="3">
+            <a:schemeClr val="accent1"/>
+          </a:fillRef>
+          <a:effectRef idx="2">
+            <a:schemeClr val="accent1"/>
+          </a:effectRef>
+          <a:fontRef idx="minor">
+            <a:schemeClr val="lt1"/>
+          </a:fontRef>
+        </p:style>
+        <p:txBody>
+          <a:bodyPr rtlCol="0" anchor="ctr"/>
+          <a:lstStyle/>
+          <a:p>
+            <a:pPr algn="ctr"/>
+          </a:p>
+        </p:txBody>
+      </p:sp>
+      <p:sp>
+        <p:nvSpPr>
+          <p:cNvPr id="3" name="Rectangle 2"/>
+          <p:cNvSpPr/>
+          <p:nvPr/>
+        </p:nvSpPr>
+        <p:spPr>
+          <a:xfrm>
+            <a:off x="0" y="1051560"/>
+            <a:ext cx="12191695" cy="54864"/>
+          </a:xfrm>
+          <a:prstGeom prst="rect">
+            <a:avLst/>
+          </a:prstGeom>
+          <a:solidFill>
+            <a:srgbClr val="FF7A1A"/>
+          </a:solidFill>
+          <a:ln>
+            <a:noFill/>
+          </a:ln>
+          <a:effectLst/>
+        </p:spPr>
+        <p:style>
+          <a:lnRef idx="1">
+            <a:schemeClr val="accent1"/>
+          </a:lnRef>
+          <a:fillRef idx="3">
+            <a:schemeClr val="accent1"/>
+          </a:fillRef>
+          <a:effectRef idx="2">
+            <a:schemeClr val="accent1"/>
+          </a:effectRef>
+          <a:fontRef idx="minor">
+            <a:schemeClr val="lt1"/>
+          </a:fontRef>
+        </p:style>
+        <p:txBody>
+          <a:bodyPr rtlCol="0" anchor="ctr"/>
+          <a:lstStyle/>
+          <a:p>
+            <a:pPr algn="ctr"/>
+          </a:p>
+        </p:txBody>
+      </p:sp>
+      <p:sp>
+        <p:nvSpPr>
+          <p:cNvPr id="4" name="TextBox 3"/>
+          <p:cNvSpPr txBox="1"/>
+          <p:nvPr/>
+        </p:nvSpPr>
+        <p:spPr>
+          <a:xfrm>
+            <a:off x="457200" y="164592"/>
+            <a:ext cx="11247120" cy="731520"/>
+          </a:xfrm>
+          <a:prstGeom prst="rect">
+            <a:avLst/>
+          </a:prstGeom>
+          <a:noFill/>
+        </p:spPr>
+        <p:txBody>
+          <a:bodyPr wrap="square" anchor="ctr">
+            <a:spAutoFit/>
+          </a:bodyPr>
+          <a:lstStyle/>
+          <a:p>
+            <a:pPr algn="l"/>
+            <a:r>
+              <a:rPr sz="3000" b="1">
+                <a:solidFill>
+                  <a:srgbClr val="FFFFFF"/>
+                </a:solidFill>
+                <a:latin typeface="Segoe UI"/>
+              </a:rPr>
+              <a:t>Siguientes pasos</a:t>
+            </a:r>
+          </a:p>
+        </p:txBody>
+      </p:sp>
+      <p:sp>
+        <p:nvSpPr>
+          <p:cNvPr id="5" name="Rectangle 4"/>
+          <p:cNvSpPr/>
+          <p:nvPr/>
+        </p:nvSpPr>
+        <p:spPr>
+          <a:xfrm>
+            <a:off x="457200" y="1371600"/>
+            <a:ext cx="5486400" cy="4846320"/>
+          </a:xfrm>
+          <a:prstGeom prst="rect">
+            <a:avLst/>
+          </a:prstGeom>
+          <a:solidFill>
+            <a:srgbClr val="F4F6FA"/>
+          </a:solidFill>
+          <a:ln>
+            <a:noFill/>
+          </a:ln>
+          <a:effectLst/>
+        </p:spPr>
+        <p:style>
+          <a:lnRef idx="1">
+            <a:schemeClr val="accent1"/>
+          </a:lnRef>
+          <a:fillRef idx="3">
+            <a:schemeClr val="accent1"/>
+          </a:fillRef>
+          <a:effectRef idx="2">
+            <a:schemeClr val="accent1"/>
+          </a:effectRef>
+          <a:fontRef idx="minor">
+            <a:schemeClr val="lt1"/>
+          </a:fontRef>
+        </p:style>
+        <p:txBody>
+          <a:bodyPr rtlCol="0" anchor="ctr"/>
+          <a:lstStyle/>
+          <a:p>
+            <a:pPr algn="ctr"/>
+          </a:p>
+        </p:txBody>
+      </p:sp>
+      <p:sp>
+        <p:nvSpPr>
+          <p:cNvPr id="6" name="Rectangle 5"/>
+          <p:cNvSpPr/>
+          <p:nvPr/>
+        </p:nvSpPr>
+        <p:spPr>
+          <a:xfrm>
+            <a:off x="457200" y="1371600"/>
+            <a:ext cx="73152" cy="4846320"/>
+          </a:xfrm>
+          <a:prstGeom prst="rect">
+            <a:avLst/>
+          </a:prstGeom>
+          <a:solidFill>
+            <a:srgbClr val="FF7A1A"/>
+          </a:solidFill>
+          <a:ln>
+            <a:noFill/>
+          </a:ln>
+          <a:effectLst/>
+        </p:spPr>
+        <p:style>
+          <a:lnRef idx="1">
+            <a:schemeClr val="accent1"/>
+          </a:lnRef>
+          <a:fillRef idx="3">
+            <a:schemeClr val="accent1"/>
+          </a:fillRef>
+          <a:effectRef idx="2">
+            <a:schemeClr val="accent1"/>
+          </a:effectRef>
+          <a:fontRef idx="minor">
+            <a:schemeClr val="lt1"/>
+          </a:fontRef>
+        </p:style>
+        <p:txBody>
+          <a:bodyPr rtlCol="0" anchor="ctr"/>
+          <a:lstStyle/>
+          <a:p>
+            <a:pPr algn="ctr"/>
+          </a:p>
+        </p:txBody>
+      </p:sp>
+      <p:sp>
+        <p:nvSpPr>
+          <p:cNvPr id="7" name="TextBox 6"/>
+          <p:cNvSpPr txBox="1"/>
+          <p:nvPr/>
+        </p:nvSpPr>
+        <p:spPr>
+          <a:xfrm>
+            <a:off x="640080" y="1444752"/>
+            <a:ext cx="5212080" cy="411480"/>
+          </a:xfrm>
+          <a:prstGeom prst="rect">
+            <a:avLst/>
+          </a:prstGeom>
+          <a:noFill/>
+        </p:spPr>
+        <p:txBody>
+          <a:bodyPr wrap="square" anchor="t">
+            <a:spAutoFit/>
+          </a:bodyPr>
+          <a:lstStyle/>
+          <a:p>
+            <a:pPr algn="l"/>
+            <a:r>
+              <a:rPr sz="1700" b="1">
+                <a:solidFill>
+                  <a:srgbClr val="0B1F3A"/>
+                </a:solidFill>
+                <a:latin typeface="Segoe UI"/>
+              </a:rPr>
+              <a:t>Para llevarlo más lejos</a:t>
+            </a:r>
+          </a:p>
+        </p:txBody>
+      </p:sp>
+      <p:sp>
+        <p:nvSpPr>
+          <p:cNvPr id="8" name="TextBox 7"/>
+          <p:cNvSpPr txBox="1"/>
+          <p:nvPr/>
+        </p:nvSpPr>
+        <p:spPr>
+          <a:xfrm>
+            <a:off x="640080" y="1901952"/>
+            <a:ext cx="5212080" cy="4251959"/>
+          </a:xfrm>
+          <a:prstGeom prst="rect">
+            <a:avLst/>
+          </a:prstGeom>
+          <a:noFill/>
+        </p:spPr>
+        <p:txBody>
+          <a:bodyPr wrap="square" anchor="t">
+            <a:spAutoFit/>
+          </a:bodyPr>
+          <a:lstStyle/>
+          <a:p>
+            <a:pPr algn="l"/>
+            <a:r>
+              <a:rPr sz="1700" b="0">
+                <a:solidFill>
+                  <a:srgbClr val="5B6678"/>
+                </a:solidFill>
+                <a:latin typeface="Segoe UI"/>
+              </a:rPr>
+              <a:t>Ensayar el recorrido completo en el navegador con el equipo.</a:t>
+            </a:r>
+          </a:p>
+          <a:p>
+            <a:pPr algn="l">
+              <a:spcBef>
+                <a:spcPts val="600"/>
+              </a:spcBef>
+            </a:pPr>
+            <a:r>
+              <a:rPr sz="1700" b="0">
+                <a:solidFill>
+                  <a:srgbClr val="5B6678"/>
+                </a:solidFill>
+                <a:latin typeface="Segoe UI"/>
+              </a:rPr>
+              <a:t>Guardar seguimiento y mensajes en un sistema compartido, para que el supervisor los vea desde su equipo.</a:t>
+            </a:r>
+          </a:p>
+          <a:p>
+            <a:pPr algn="l">
+              <a:spcBef>
+                <a:spcPts val="600"/>
+              </a:spcBef>
+            </a:pPr>
+            <a:r>
+              <a:rPr sz="1700" b="0">
+                <a:solidFill>
+                  <a:srgbClr val="5B6678"/>
+                </a:solidFill>
+                <a:latin typeface="Segoe UI"/>
+              </a:rPr>
+              <a:t>Crear wallets y pagos desde la aplicación.</a:t>
+            </a:r>
+          </a:p>
+        </p:txBody>
+      </p:sp>
+      <p:sp>
+        <p:nvSpPr>
+          <p:cNvPr id="9" name="Rectangle 8"/>
+          <p:cNvSpPr/>
+          <p:nvPr/>
+        </p:nvSpPr>
+        <p:spPr>
+          <a:xfrm>
+            <a:off x="6217920" y="1371600"/>
+            <a:ext cx="5486400" cy="4846320"/>
+          </a:xfrm>
+          <a:prstGeom prst="rect">
+            <a:avLst/>
+          </a:prstGeom>
+          <a:solidFill>
+            <a:srgbClr val="F4F6FA"/>
+          </a:solidFill>
+          <a:ln>
+            <a:noFill/>
+          </a:ln>
+          <a:effectLst/>
+        </p:spPr>
+        <p:style>
+          <a:lnRef idx="1">
+            <a:schemeClr val="accent1"/>
+          </a:lnRef>
+          <a:fillRef idx="3">
+            <a:schemeClr val="accent1"/>
+          </a:fillRef>
+          <a:effectRef idx="2">
+            <a:schemeClr val="accent1"/>
+          </a:effectRef>
+          <a:fontRef idx="minor">
+            <a:schemeClr val="lt1"/>
+          </a:fontRef>
+        </p:style>
+        <p:txBody>
+          <a:bodyPr rtlCol="0" anchor="ctr"/>
+          <a:lstStyle/>
+          <a:p>
+            <a:pPr algn="ctr"/>
+          </a:p>
+        </p:txBody>
+      </p:sp>
+      <p:sp>
+        <p:nvSpPr>
+          <p:cNvPr id="10" name="Rectangle 9"/>
+          <p:cNvSpPr/>
+          <p:nvPr/>
+        </p:nvSpPr>
+        <p:spPr>
+          <a:xfrm>
+            <a:off x="6217920" y="1371600"/>
+            <a:ext cx="73152" cy="4846320"/>
+          </a:xfrm>
+          <a:prstGeom prst="rect">
+            <a:avLst/>
+          </a:prstGeom>
+          <a:solidFill>
+            <a:srgbClr val="2D6CDF"/>
+          </a:solidFill>
+          <a:ln>
+            <a:noFill/>
+          </a:ln>
+          <a:effectLst/>
+        </p:spPr>
+        <p:style>
+          <a:lnRef idx="1">
+            <a:schemeClr val="accent1"/>
+          </a:lnRef>
+          <a:fillRef idx="3">
+            <a:schemeClr val="accent1"/>
+          </a:fillRef>
+          <a:effectRef idx="2">
+            <a:schemeClr val="accent1"/>
+          </a:effectRef>
+          <a:fontRef idx="minor">
+            <a:schemeClr val="lt1"/>
+          </a:fontRef>
+        </p:style>
+        <p:txBody>
+          <a:bodyPr rtlCol="0" anchor="ctr"/>
+          <a:lstStyle/>
+          <a:p>
+            <a:pPr algn="ctr"/>
+          </a:p>
+        </p:txBody>
+      </p:sp>
+      <p:sp>
+        <p:nvSpPr>
+          <p:cNvPr id="11" name="TextBox 10"/>
+          <p:cNvSpPr txBox="1"/>
+          <p:nvPr/>
+        </p:nvSpPr>
+        <p:spPr>
+          <a:xfrm>
+            <a:off x="6400800" y="1444752"/>
+            <a:ext cx="5212080" cy="411480"/>
+          </a:xfrm>
+          <a:prstGeom prst="rect">
+            <a:avLst/>
+          </a:prstGeom>
+          <a:noFill/>
+        </p:spPr>
+        <p:txBody>
+          <a:bodyPr wrap="square" anchor="t">
+            <a:spAutoFit/>
+          </a:bodyPr>
+          <a:lstStyle/>
+          <a:p>
+            <a:pPr algn="l"/>
+            <a:r>
+              <a:rPr sz="1700" b="1">
+                <a:solidFill>
+                  <a:srgbClr val="0B1F3A"/>
+                </a:solidFill>
+                <a:latin typeface="Segoe UI"/>
+              </a:rPr>
+              <a:t>Lo que mostramos hoy</a:t>
+            </a:r>
+          </a:p>
+        </p:txBody>
+      </p:sp>
+      <p:sp>
+        <p:nvSpPr>
+          <p:cNvPr id="12" name="TextBox 11"/>
+          <p:cNvSpPr txBox="1"/>
+          <p:nvPr/>
+        </p:nvSpPr>
+        <p:spPr>
+          <a:xfrm>
+            <a:off x="6400800" y="1901952"/>
+            <a:ext cx="5212080" cy="4251959"/>
+          </a:xfrm>
+          <a:prstGeom prst="rect">
+            <a:avLst/>
+          </a:prstGeom>
+          <a:noFill/>
+        </p:spPr>
+        <p:txBody>
+          <a:bodyPr wrap="square" anchor="t">
+            <a:spAutoFit/>
+          </a:bodyPr>
+          <a:lstStyle/>
+          <a:p>
+            <a:pPr algn="l"/>
+            <a:r>
+              <a:rPr sz="1700" b="0">
+                <a:solidFill>
+                  <a:srgbClr val="5B6678"/>
+                </a:solidFill>
+                <a:latin typeface="Segoe UI"/>
+              </a:rPr>
+              <a:t>El problema y su impacto en operaciones.</a:t>
+            </a:r>
+          </a:p>
+          <a:p>
+            <a:pPr algn="l">
+              <a:spcBef>
+                <a:spcPts val="600"/>
+              </a:spcBef>
+            </a:pPr>
+            <a:r>
+              <a:rPr sz="1700" b="0">
+                <a:solidFill>
+                  <a:srgbClr val="5B6678"/>
+                </a:solidFill>
+                <a:latin typeface="Segoe UI"/>
+              </a:rPr>
+              <a:t>Un flujo MVP completo, de la carga a la decisión del supervisor.</a:t>
+            </a:r>
+          </a:p>
+          <a:p>
+            <a:pPr algn="l">
+              <a:spcBef>
+                <a:spcPts val="600"/>
+              </a:spcBef>
+            </a:pPr>
+            <a:r>
+              <a:rPr sz="1700" b="0">
+                <a:solidFill>
+                  <a:srgbClr val="5B6678"/>
+                </a:solidFill>
+                <a:latin typeface="Segoe UI"/>
+              </a:rPr>
+              <a:t>Un agente de IA que reduce la fatiga del supervisor.</a:t>
+            </a:r>
+          </a:p>
+          <a:p>
+            <a:pPr algn="l">
+              <a:spcBef>
+                <a:spcPts val="600"/>
+              </a:spcBef>
+            </a:pPr>
+            <a:r>
+              <a:rPr sz="1700" b="0">
+                <a:solidFill>
+                  <a:srgbClr val="5B6678"/>
+                </a:solidFill>
+                <a:latin typeface="Segoe UI"/>
+              </a:rPr>
+              <a:t>Un método con specs, pruebas y revisión humana.</a:t>
             </a:r>
           </a:p>
         </p:txBody>
@@ -4694,7 +5232,7 @@
                 </a:solidFill>
                 <a:latin typeface="Segoe UI"/>
               </a:rPr>
-              <a:t>5 historias de usuario, cada una con su spec.</a:t>
+              <a:t>Un agente de IA que prepara el mensaje para el supervisor.</a:t>
             </a:r>
           </a:p>
           <a:p>
@@ -4710,7 +5248,7 @@
                 </a:solidFill>
                 <a:latin typeface="Segoe UI"/>
               </a:rPr>
-              <a:t>122 pruebas automáticas (98 % de cobertura).</a:t>
+              <a:t>6 historias de usuario, cada una con su spec.</a:t>
             </a:r>
           </a:p>
         </p:txBody>
@@ -4724,8 +5262,8 @@
           <p:nvPr/>
         </p:nvGraphicFramePr>
         <p:xfrm>
-          <a:off x="457200" y="3840480"/>
-          <a:ext cx="11247120" cy="2743200"/>
+          <a:off x="457200" y="3749039"/>
+          <a:ext cx="11247120" cy="2880360"/>
         </p:xfrm>
         <a:graphic>
           <a:graphicData uri="http://schemas.openxmlformats.org/drawingml/2006/table">
@@ -4734,23 +5272,23 @@
                 <a:tableStyleId>{5C22544A-7EE6-4342-B048-85BDC9FD1C3A}</a:tableStyleId>
               </a:tblPr>
               <a:tblGrid>
-                <a:gridCol w="2743200"/>
-                <a:gridCol w="8503920"/>
+                <a:gridCol w="3017520"/>
+                <a:gridCol w="8229600"/>
               </a:tblGrid>
-              <a:tr h="457200">
+              <a:tr h="411480">
                 <a:tc>
                   <a:txBody>
                     <a:bodyPr/>
                     <a:lstStyle/>
                     <a:p>
                       <a:r>
-                        <a:rPr sz="1500" b="1">
+                        <a:rPr sz="1400" b="1">
                           <a:solidFill>
                             <a:srgbClr val="FFFFFF"/>
                           </a:solidFill>
                           <a:latin typeface="Segoe UI"/>
                         </a:rPr>
-                        <a:t>El analista puede…</a:t>
+                        <a:t>El equipo puede…</a:t>
                       </a:r>
                     </a:p>
                   </a:txBody>
@@ -4766,7 +5304,7 @@
                     <a:lstStyle/>
                     <a:p>
                       <a:r>
-                        <a:rPr sz="1500" b="1">
+                        <a:rPr sz="1400" b="1">
                           <a:solidFill>
                             <a:srgbClr val="FFFFFF"/>
                           </a:solidFill>
@@ -4783,14 +5321,14 @@
                   </a:tcPr>
                 </a:tc>
               </a:tr>
-              <a:tr h="457200">
+              <a:tr h="411480">
                 <a:tc>
                   <a:txBody>
                     <a:bodyPr/>
                     <a:lstStyle/>
                     <a:p>
                       <a:r>
-                        <a:rPr sz="1500" b="0">
+                        <a:rPr sz="1400" b="0">
                           <a:solidFill>
                             <a:srgbClr val="0B1F3A"/>
                           </a:solidFill>
@@ -4812,7 +5350,7 @@
                     <a:lstStyle/>
                     <a:p>
                       <a:r>
-                        <a:rPr sz="1500" b="0">
+                        <a:rPr sz="1400" b="0">
                           <a:solidFill>
                             <a:srgbClr val="0B1F3A"/>
                           </a:solidFill>
@@ -4829,14 +5367,14 @@
                   </a:tcPr>
                 </a:tc>
               </a:tr>
-              <a:tr h="457200">
+              <a:tr h="411480">
                 <a:tc>
                   <a:txBody>
                     <a:bodyPr/>
                     <a:lstStyle/>
                     <a:p>
                       <a:r>
-                        <a:rPr sz="1500" b="0">
+                        <a:rPr sz="1400" b="0">
                           <a:solidFill>
                             <a:srgbClr val="0B1F3A"/>
                           </a:solidFill>
@@ -4858,7 +5396,7 @@
                     <a:lstStyle/>
                     <a:p>
                       <a:r>
-                        <a:rPr sz="1500" b="0">
+                        <a:rPr sz="1400" b="0">
                           <a:solidFill>
                             <a:srgbClr val="0B1F3A"/>
                           </a:solidFill>
@@ -4875,14 +5413,14 @@
                   </a:tcPr>
                 </a:tc>
               </a:tr>
-              <a:tr h="457200">
+              <a:tr h="411480">
                 <a:tc>
                   <a:txBody>
                     <a:bodyPr/>
                     <a:lstStyle/>
                     <a:p>
                       <a:r>
-                        <a:rPr sz="1500" b="0">
+                        <a:rPr sz="1400" b="0">
                           <a:solidFill>
                             <a:srgbClr val="0B1F3A"/>
                           </a:solidFill>
@@ -4904,7 +5442,7 @@
                     <a:lstStyle/>
                     <a:p>
                       <a:r>
-                        <a:rPr sz="1500" b="0">
+                        <a:rPr sz="1400" b="0">
                           <a:solidFill>
                             <a:srgbClr val="0B1F3A"/>
                           </a:solidFill>
@@ -4921,20 +5459,20 @@
                   </a:tcPr>
                 </a:tc>
               </a:tr>
-              <a:tr h="457200">
+              <a:tr h="411480">
                 <a:tc>
                   <a:txBody>
                     <a:bodyPr/>
                     <a:lstStyle/>
                     <a:p>
                       <a:r>
-                        <a:rPr sz="1500" b="0">
+                        <a:rPr sz="1400" b="0">
                           <a:solidFill>
                             <a:srgbClr val="0B1F3A"/>
                           </a:solidFill>
                           <a:latin typeface="Segoe UI"/>
                         </a:rPr>
-                        <a:t>Dar seguimiento</a:t>
+                        <a:t>Atender</a:t>
                       </a:r>
                     </a:p>
                   </a:txBody>
@@ -4950,13 +5488,13 @@
                     <a:lstStyle/>
                     <a:p>
                       <a:r>
-                        <a:rPr sz="1500" b="0">
+                        <a:rPr sz="1400" b="0">
                           <a:solidFill>
                             <a:srgbClr val="0B1F3A"/>
                           </a:solidFill>
                           <a:latin typeface="Segoe UI"/>
                         </a:rPr>
-                        <a:t>Atender cada incidencia con aprobación del supervisor</a:t>
+                        <a:t>El analista inicia la atención y responde; el supervisor aprueba o devuelve</a:t>
                       </a:r>
                     </a:p>
                   </a:txBody>
@@ -4967,20 +5505,20 @@
                   </a:tcPr>
                 </a:tc>
               </a:tr>
-              <a:tr h="457200">
+              <a:tr h="411480">
                 <a:tc>
                   <a:txBody>
                     <a:bodyPr/>
                     <a:lstStyle/>
                     <a:p>
                       <a:r>
-                        <a:rPr sz="1500" b="0">
+                        <a:rPr sz="1400" b="0">
                           <a:solidFill>
                             <a:srgbClr val="0B1F3A"/>
                           </a:solidFill>
                           <a:latin typeface="Segoe UI"/>
                         </a:rPr>
-                        <a:t>Probar</a:t>
+                        <a:t>Decidir con apoyo de IA</a:t>
                       </a:r>
                     </a:p>
                   </a:txBody>
@@ -4996,7 +5534,53 @@
                     <a:lstStyle/>
                     <a:p>
                       <a:r>
-                        <a:rPr sz="1500" b="0">
+                        <a:rPr sz="1400" b="0">
+                          <a:solidFill>
+                            <a:srgbClr val="0B1F3A"/>
+                          </a:solidFill>
+                          <a:latin typeface="Segoe UI"/>
+                        </a:rPr>
+                        <a:t>Un agente resume el problema para que el supervisor decida más rápido</a:t>
+                      </a:r>
+                    </a:p>
+                  </a:txBody>
+                  <a:tcPr anchor="ctr">
+                    <a:solidFill>
+                      <a:srgbClr val="F4F6FA"/>
+                    </a:solidFill>
+                  </a:tcPr>
+                </a:tc>
+              </a:tr>
+              <a:tr h="411480">
+                <a:tc>
+                  <a:txBody>
+                    <a:bodyPr/>
+                    <a:lstStyle/>
+                    <a:p>
+                      <a:r>
+                        <a:rPr sz="1400" b="0">
+                          <a:solidFill>
+                            <a:srgbClr val="0B1F3A"/>
+                          </a:solidFill>
+                          <a:latin typeface="Segoe UI"/>
+                        </a:rPr>
+                        <a:t>Probar</a:t>
+                      </a:r>
+                    </a:p>
+                  </a:txBody>
+                  <a:tcPr anchor="ctr">
+                    <a:solidFill>
+                      <a:srgbClr val="FFFFFF"/>
+                    </a:solidFill>
+                  </a:tcPr>
+                </a:tc>
+                <a:tc>
+                  <a:txBody>
+                    <a:bodyPr/>
+                    <a:lstStyle/>
+                    <a:p>
+                      <a:r>
+                        <a:rPr sz="1400" b="0">
                           <a:solidFill>
                             <a:srgbClr val="0B1F3A"/>
                           </a:solidFill>
@@ -5008,7 +5592,7 @@
                   </a:txBody>
                   <a:tcPr anchor="ctr">
                     <a:solidFill>
-                      <a:srgbClr val="F4F6FA"/>
+                      <a:srgbClr val="FFFFFF"/>
                     </a:solidFill>
                   </a:tcPr>
                 </a:tc>
@@ -5257,7 +5841,7 @@
                 </a:solidFill>
                 <a:latin typeface="Segoe UI"/>
               </a:rPr>
-              <a:t>necesidad del analista</a:t>
+              <a:t>necesidad del usuario</a:t>
             </a:r>
           </a:p>
         </p:txBody>
@@ -6202,7 +6786,7 @@
                 </a:solidFill>
                 <a:latin typeface="Segoe UI"/>
               </a:rPr>
-              <a:t>Sin datos reales ni secretos</a:t>
+              <a:t>Sin datos reales ni claves en el código</a:t>
             </a:r>
           </a:p>
         </p:txBody>
@@ -6360,7 +6944,7 @@
                 </a:solidFill>
                 <a:latin typeface="Segoe UI"/>
               </a:rPr>
-              <a:t>Las 5 specs se validaron</a:t>
+              <a:t>Las 6 specs se validaron</a:t>
             </a:r>
           </a:p>
           <a:p>
@@ -6377,6 +6961,22 @@
                 <a:latin typeface="Segoe UI"/>
               </a:rPr>
               <a:t>La IA no sustituye la revisión humana del PR</a:t>
+            </a:r>
+          </a:p>
+          <a:p>
+            <a:pPr algn="l">
+              <a:spcBef>
+                <a:spcPts val="600"/>
+              </a:spcBef>
+            </a:pPr>
+            <a:r>
+              <a:rPr sz="1600" b="0">
+                <a:solidFill>
+                  <a:srgbClr val="5B6678"/>
+                </a:solidFill>
+                <a:latin typeface="Segoe UI"/>
+              </a:rPr>
+              <a:t>El supervisor siempre decide</a:t>
             </a:r>
           </a:p>
         </p:txBody>
@@ -6552,7 +7152,7 @@
                 </a:solidFill>
                 <a:latin typeface="Segoe UI"/>
               </a:rPr>
-              <a:t>Cinco historias, 110 tareas, 106 completadas.</a:t>
+              <a:t>Seis historias y 131 tareas; 126 completadas.</a:t>
             </a:r>
           </a:p>
         </p:txBody>
@@ -6566,8 +7166,8 @@
           <p:nvPr/>
         </p:nvGraphicFramePr>
         <p:xfrm>
-          <a:off x="457200" y="1783080"/>
-          <a:ext cx="11247120" cy="3712464"/>
+          <a:off x="457200" y="1737360"/>
+          <a:ext cx="11247120" cy="3657600"/>
         </p:xfrm>
         <a:graphic>
           <a:graphicData uri="http://schemas.openxmlformats.org/drawingml/2006/table">
@@ -6581,7 +7181,7 @@
                 <a:gridCol w="5212080"/>
                 <a:gridCol w="1737360"/>
               </a:tblGrid>
-              <a:tr h="530352">
+              <a:tr h="457200">
                 <a:tc>
                   <a:txBody>
                     <a:bodyPr/>
@@ -6671,7 +7271,7 @@
                   </a:tcPr>
                 </a:tc>
               </a:tr>
-              <a:tr h="530352">
+              <a:tr h="457200">
                 <a:tc>
                   <a:txBody>
                     <a:bodyPr/>
@@ -6761,7 +7361,7 @@
                   </a:tcPr>
                 </a:tc>
               </a:tr>
-              <a:tr h="530352">
+              <a:tr h="457200">
                 <a:tc>
                   <a:txBody>
                     <a:bodyPr/>
@@ -6851,7 +7451,7 @@
                   </a:tcPr>
                 </a:tc>
               </a:tr>
-              <a:tr h="530352">
+              <a:tr h="457200">
                 <a:tc>
                   <a:txBody>
                     <a:bodyPr/>
@@ -6941,7 +7541,7 @@
                   </a:tcPr>
                 </a:tc>
               </a:tr>
-              <a:tr h="530352">
+              <a:tr h="457200">
                 <a:tc>
                   <a:txBody>
                     <a:bodyPr/>
@@ -7031,7 +7631,7 @@
                   </a:tcPr>
                 </a:tc>
               </a:tr>
-              <a:tr h="530352">
+              <a:tr h="457200">
                 <a:tc>
                   <a:txBody>
                     <a:bodyPr/>
@@ -7121,7 +7721,7 @@
                   </a:tcPr>
                 </a:tc>
               </a:tr>
-              <a:tr h="530352">
+              <a:tr h="457200">
                 <a:tc>
                   <a:txBody>
                     <a:bodyPr/>
@@ -7134,7 +7734,7 @@
                           </a:solidFill>
                           <a:latin typeface="Segoe UI"/>
                         </a:rPr>
-                        <a:t>Total</a:t>
+                        <a:t>HU-CONC-06 Agente supervisor</a:t>
                       </a:r>
                     </a:p>
                   </a:txBody>
@@ -7156,7 +7756,7 @@
                           </a:solidFill>
                           <a:latin typeface="Segoe UI"/>
                         </a:rPr>
-                        <a:t/>
+                        <a:t>nueva</a:t>
                       </a:r>
                     </a:p>
                   </a:txBody>
@@ -7178,7 +7778,7 @@
                           </a:solidFill>
                           <a:latin typeface="Segoe UI"/>
                         </a:rPr>
-                        <a:t/>
+                        <a:t>Mensaje de IA que reduce la fatiga del supervisor</a:t>
                       </a:r>
                     </a:p>
                   </a:txBody>
@@ -7200,7 +7800,7 @@
                           </a:solidFill>
                           <a:latin typeface="Segoe UI"/>
                         </a:rPr>
-                        <a:t>106 / 110</a:t>
+                        <a:t>20 / 21</a:t>
                       </a:r>
                     </a:p>
                   </a:txBody>
@@ -7211,6 +7811,96 @@
                   </a:tcPr>
                 </a:tc>
               </a:tr>
+              <a:tr h="457200">
+                <a:tc>
+                  <a:txBody>
+                    <a:bodyPr/>
+                    <a:lstStyle/>
+                    <a:p>
+                      <a:r>
+                        <a:rPr sz="1400" b="0">
+                          <a:solidFill>
+                            <a:srgbClr val="0B1F3A"/>
+                          </a:solidFill>
+                          <a:latin typeface="Segoe UI"/>
+                        </a:rPr>
+                        <a:t>Total</a:t>
+                      </a:r>
+                    </a:p>
+                  </a:txBody>
+                  <a:tcPr anchor="ctr">
+                    <a:solidFill>
+                      <a:srgbClr val="F4F6FA"/>
+                    </a:solidFill>
+                  </a:tcPr>
+                </a:tc>
+                <a:tc>
+                  <a:txBody>
+                    <a:bodyPr/>
+                    <a:lstStyle/>
+                    <a:p>
+                      <a:r>
+                        <a:rPr sz="1400" b="0">
+                          <a:solidFill>
+                            <a:srgbClr val="0B1F3A"/>
+                          </a:solidFill>
+                          <a:latin typeface="Segoe UI"/>
+                        </a:rPr>
+                        <a:t/>
+                      </a:r>
+                    </a:p>
+                  </a:txBody>
+                  <a:tcPr anchor="ctr">
+                    <a:solidFill>
+                      <a:srgbClr val="F4F6FA"/>
+                    </a:solidFill>
+                  </a:tcPr>
+                </a:tc>
+                <a:tc>
+                  <a:txBody>
+                    <a:bodyPr/>
+                    <a:lstStyle/>
+                    <a:p>
+                      <a:r>
+                        <a:rPr sz="1400" b="0">
+                          <a:solidFill>
+                            <a:srgbClr val="0B1F3A"/>
+                          </a:solidFill>
+                          <a:latin typeface="Segoe UI"/>
+                        </a:rPr>
+                        <a:t/>
+                      </a:r>
+                    </a:p>
+                  </a:txBody>
+                  <a:tcPr anchor="ctr">
+                    <a:solidFill>
+                      <a:srgbClr val="F4F6FA"/>
+                    </a:solidFill>
+                  </a:tcPr>
+                </a:tc>
+                <a:tc>
+                  <a:txBody>
+                    <a:bodyPr/>
+                    <a:lstStyle/>
+                    <a:p>
+                      <a:r>
+                        <a:rPr sz="1400" b="0">
+                          <a:solidFill>
+                            <a:srgbClr val="0B1F3A"/>
+                          </a:solidFill>
+                          <a:latin typeface="Segoe UI"/>
+                        </a:rPr>
+                        <a:t>126 / 131</a:t>
+                      </a:r>
+                    </a:p>
+                  </a:txBody>
+                  <a:tcPr anchor="ctr">
+                    <a:solidFill>
+                      <a:srgbClr val="F4F6FA"/>
+                    </a:solidFill>
+                  </a:tcPr>
+                </a:tc>
+              </a:tr>
             </a:tbl>
           </a:graphicData>
         </a:graphic>
@@ -7223,8 +7913,8 @@
         </p:nvSpPr>
         <p:spPr>
           <a:xfrm>
-            <a:off x="457200" y="5669280"/>
-            <a:ext cx="11247120" cy="822960"/>
+            <a:off x="457200" y="5577840"/>
+            <a:ext cx="11247120" cy="1005840"/>
           </a:xfrm>
           <a:prstGeom prst="rect">
             <a:avLst/>
@@ -7245,7 +7935,7 @@
                 </a:solidFill>
                 <a:latin typeface="Segoe UI"/>
               </a:rPr>
-              <a:t>Las 4 tareas pendientes son comparar con la demo original; se documentó que no se hicieron y se validó contra el servicio real.</a:t>
+              <a:t>Las 5 tareas pendientes: 4 eran comparar con la demo original (se documentó que no se hicieron) y 1 es el recorrido completo en el navegador con el agente.</a:t>
             </a:r>
           </a:p>
         </p:txBody>
@@ -7421,7 +8111,7 @@
                 </a:solidFill>
                 <a:latin typeface="Segoe UI"/>
               </a:rPr>
-              <a:t>Lo que vive el analista, de la carga de datos al cierre de la incidencia.</a:t>
+              <a:t>De la carga de datos a la decisión del supervisor.</a:t>
             </a:r>
           </a:p>
         </p:txBody>
@@ -7434,8 +8124,8 @@
         </p:nvSpPr>
         <p:spPr>
           <a:xfrm>
-            <a:off x="457200" y="1783080"/>
-            <a:ext cx="2011680" cy="1371600"/>
+            <a:off x="457200" y="1645920"/>
+            <a:ext cx="1691640" cy="1280160"/>
           </a:xfrm>
           <a:prstGeom prst="roundRect">
             <a:avLst/>
@@ -7490,7 +8180,7 @@
                 </a:solidFill>
                 <a:latin typeface="Segoe UI"/>
               </a:rPr>
-              <a:t>trae los datos de la wallet</a:t>
+              <a:t>datos de la wallet</a:t>
             </a:r>
           </a:p>
         </p:txBody>
@@ -7503,8 +8193,8 @@
         </p:nvSpPr>
         <p:spPr>
           <a:xfrm>
-            <a:off x="2496312" y="2331720"/>
-            <a:ext cx="265176" cy="274320"/>
+            <a:off x="2176272" y="2148840"/>
+            <a:ext cx="164592" cy="274320"/>
           </a:xfrm>
           <a:prstGeom prst="rightArrow">
             <a:avLst/>
@@ -7547,8 +8237,8 @@
         </p:nvSpPr>
         <p:spPr>
           <a:xfrm>
-            <a:off x="2788920" y="1783080"/>
-            <a:ext cx="2011680" cy="1371600"/>
+            <a:off x="2368296" y="1645920"/>
+            <a:ext cx="1691640" cy="1280160"/>
           </a:xfrm>
           <a:prstGeom prst="roundRect">
             <a:avLst/>
@@ -7603,7 +8293,7 @@
                 </a:solidFill>
                 <a:latin typeface="Segoe UI"/>
               </a:rPr>
-              <a:t>compara y cuenta diferencias</a:t>
+              <a:t>cuenta diferencias</a:t>
             </a:r>
           </a:p>
         </p:txBody>
@@ -7616,8 +8306,8 @@
         </p:nvSpPr>
         <p:spPr>
           <a:xfrm>
-            <a:off x="4828032" y="2331720"/>
-            <a:ext cx="265176" cy="274320"/>
+            <a:off x="4087368" y="2148840"/>
+            <a:ext cx="164592" cy="274320"/>
           </a:xfrm>
           <a:prstGeom prst="rightArrow">
             <a:avLst/>
@@ -7660,8 +8350,8 @@
         </p:nvSpPr>
         <p:spPr>
           <a:xfrm>
-            <a:off x="5120640" y="1783080"/>
-            <a:ext cx="2011680" cy="1371600"/>
+            <a:off x="4279392" y="1645920"/>
+            <a:ext cx="1691640" cy="1280160"/>
           </a:xfrm>
           <a:prstGeom prst="roundRect">
             <a:avLst/>
@@ -7716,7 +8406,7 @@
                 </a:solidFill>
                 <a:latin typeface="Segoe UI"/>
               </a:rPr>
-              <a:t>abre una operación con diferencia</a:t>
+              <a:t>abre la operación</a:t>
             </a:r>
           </a:p>
         </p:txBody>
@@ -7729,8 +8419,8 @@
         </p:nvSpPr>
         <p:spPr>
           <a:xfrm>
-            <a:off x="7159752" y="2331720"/>
-            <a:ext cx="265176" cy="274320"/>
+            <a:off x="5998464" y="2148840"/>
+            <a:ext cx="164592" cy="274320"/>
           </a:xfrm>
           <a:prstGeom prst="rightArrow">
             <a:avLst/>
@@ -7773,8 +8463,8 @@
         </p:nvSpPr>
         <p:spPr>
           <a:xfrm>
-            <a:off x="7452360" y="1783080"/>
-            <a:ext cx="2011680" cy="1371600"/>
+            <a:off x="6190488" y="1645920"/>
+            <a:ext cx="1691640" cy="1280160"/>
           </a:xfrm>
           <a:prstGeom prst="roundRect">
             <a:avLst/>
@@ -7813,7 +8503,7 @@
                 </a:solidFill>
                 <a:latin typeface="Segoe UI"/>
               </a:rPr>
-              <a:t>4 · Seguimiento</a:t>
+              <a:t>4 · Analista</a:t>
             </a:r>
           </a:p>
           <a:p>
@@ -7829,7 +8519,7 @@
                 </a:solidFill>
                 <a:latin typeface="Segoe UI"/>
               </a:rPr>
-              <a:t>analista → supervisor</a:t>
+              <a:t>inicia y responde</a:t>
             </a:r>
           </a:p>
         </p:txBody>
@@ -7842,8 +8532,8 @@
         </p:nvSpPr>
         <p:spPr>
           <a:xfrm>
-            <a:off x="9491472" y="2331720"/>
-            <a:ext cx="265176" cy="274320"/>
+            <a:off x="7909559" y="2148840"/>
+            <a:ext cx="164592" cy="274320"/>
           </a:xfrm>
           <a:prstGeom prst="rightArrow">
             <a:avLst/>
@@ -7886,8 +8576,121 @@
         </p:nvSpPr>
         <p:spPr>
           <a:xfrm>
-            <a:off x="9784080" y="1783080"/>
-            <a:ext cx="2011680" cy="1371600"/>
+            <a:off x="8101583" y="1645920"/>
+            <a:ext cx="1691640" cy="1280160"/>
+          </a:xfrm>
+          <a:prstGeom prst="roundRect">
+            <a:avLst/>
+          </a:prstGeom>
+          <a:solidFill>
+            <a:srgbClr val="0B1F3A"/>
+          </a:solidFill>
+          <a:ln>
+            <a:noFill/>
+          </a:ln>
+          <a:effectLst/>
+        </p:spPr>
+        <p:style>
+          <a:lnRef idx="1">
+            <a:schemeClr val="accent1"/>
+          </a:lnRef>
+          <a:fillRef idx="3">
+            <a:schemeClr val="accent1"/>
+          </a:fillRef>
+          <a:effectRef idx="2">
+            <a:schemeClr val="accent1"/>
+          </a:effectRef>
+          <a:fontRef idx="minor">
+            <a:schemeClr val="lt1"/>
+          </a:fontRef>
+        </p:style>
+        <p:txBody>
+          <a:bodyPr rtlCol="0" anchor="ctr" wrap="square"/>
+          <a:lstStyle/>
+          <a:p>
+            <a:pPr algn="ctr"/>
+            <a:r>
+              <a:rPr sz="1600" b="1">
+                <a:solidFill>
+                  <a:srgbClr val="FFFFFF"/>
+                </a:solidFill>
+                <a:latin typeface="Segoe UI"/>
+              </a:rPr>
+              <a:t>5 · Agente IA</a:t>
+            </a:r>
+          </a:p>
+          <a:p>
+            <a:pPr algn="ctr">
+              <a:spcBef>
+                <a:spcPts val="600"/>
+              </a:spcBef>
+            </a:pPr>
+            <a:r>
+              <a:rPr sz="1200" b="0">
+                <a:solidFill>
+                  <a:srgbClr val="FFFFFF"/>
+                </a:solidFill>
+                <a:latin typeface="Segoe UI"/>
+              </a:rPr>
+              <a:t>lee y deja mensaje</a:t>
+            </a:r>
+          </a:p>
+        </p:txBody>
+      </p:sp>
+      <p:sp>
+        <p:nvSpPr>
+          <p:cNvPr id="15" name="Right Arrow 14"/>
+          <p:cNvSpPr/>
+          <p:nvPr/>
+        </p:nvSpPr>
+        <p:spPr>
+          <a:xfrm>
+            <a:off x="9820655" y="2148840"/>
+            <a:ext cx="164592" cy="274320"/>
+          </a:xfrm>
+          <a:prstGeom prst="rightArrow">
+            <a:avLst/>
+          </a:prstGeom>
+          <a:solidFill>
+            <a:srgbClr val="FF7A1A"/>
+          </a:solidFill>
+          <a:ln>
+            <a:noFill/>
+          </a:ln>
+          <a:effectLst/>
+        </p:spPr>
+        <p:style>
+          <a:lnRef idx="1">
+            <a:schemeClr val="accent1"/>
+          </a:lnRef>
+          <a:fillRef idx="3">
+            <a:schemeClr val="accent1"/>
+          </a:fillRef>
+          <a:effectRef idx="2">
+            <a:schemeClr val="accent1"/>
+          </a:effectRef>
+          <a:fontRef idx="minor">
+            <a:schemeClr val="lt1"/>
+          </a:fontRef>
+        </p:style>
+        <p:txBody>
+          <a:bodyPr rtlCol="0" anchor="ctr"/>
+          <a:lstStyle/>
+          <a:p>
+            <a:pPr algn="ctr"/>
+          </a:p>
+        </p:txBody>
+      </p:sp>
+      <p:sp>
+        <p:nvSpPr>
+          <p:cNvPr id="16" name="Rounded Rectangle 15"/>
+          <p:cNvSpPr/>
+          <p:nvPr/>
+        </p:nvSpPr>
+        <p:spPr>
+          <a:xfrm>
+            <a:off x="10012680" y="1645920"/>
+            <a:ext cx="1691640" cy="1280160"/>
           </a:xfrm>
           <a:prstGeom prst="roundRect">
             <a:avLst/>
@@ -7926,7 +8729,7 @@
                 </a:solidFill>
                 <a:latin typeface="Segoe UI"/>
               </a:rPr>
-              <a:t>5 · Re-conciliar</a:t>
+              <a:t>6 · Supervisor</a:t>
             </a:r>
           </a:p>
           <a:p>
@@ -7942,22 +8745,22 @@
                 </a:solidFill>
                 <a:latin typeface="Segoe UI"/>
               </a:rPr>
-              <a:t>prueba un nuevo escenario</a:t>
+              <a:t>lee y decide</a:t>
             </a:r>
           </a:p>
         </p:txBody>
       </p:sp>
       <p:graphicFrame>
         <p:nvGraphicFramePr>
-          <p:cNvPr id="15" name="Table 14"/>
+          <p:cNvPr id="17" name="Table 16"/>
           <p:cNvGraphicFramePr>
             <a:graphicFrameLocks noGrp="1"/>
           </p:cNvGraphicFramePr>
           <p:nvPr/>
         </p:nvGraphicFramePr>
         <p:xfrm>
-          <a:off x="457200" y="3474720"/>
-          <a:ext cx="11247120" cy="2743200"/>
+          <a:off x="457200" y="3200400"/>
+          <a:ext cx="11247120" cy="2880360"/>
         </p:xfrm>
         <a:graphic>
           <a:graphicData uri="http://schemas.openxmlformats.org/drawingml/2006/table">
@@ -7969,14 +8772,14 @@
                 <a:gridCol w="1005840"/>
                 <a:gridCol w="10241280"/>
               </a:tblGrid>
-              <a:tr h="457200">
+              <a:tr h="411480">
                 <a:tc>
                   <a:txBody>
                     <a:bodyPr/>
                     <a:lstStyle/>
                     <a:p>
                       <a:r>
-                        <a:rPr sz="1500" b="1">
+                        <a:rPr sz="1400" b="1">
                           <a:solidFill>
                             <a:srgbClr val="FFFFFF"/>
                           </a:solidFill>
@@ -7998,13 +8801,13 @@
                     <a:lstStyle/>
                     <a:p>
                       <a:r>
-                        <a:rPr sz="1500" b="1">
+                        <a:rPr sz="1400" b="1">
                           <a:solidFill>
                             <a:srgbClr val="FFFFFF"/>
                           </a:solidFill>
                           <a:latin typeface="Segoe UI"/>
                         </a:rPr>
-                        <a:t>Qué ve el analista</a:t>
+                        <a:t>Qué pasa</a:t>
                       </a:r>
                     </a:p>
                   </a:txBody>
@@ -8015,14 +8818,14 @@
                   </a:tcPr>
                 </a:tc>
               </a:tr>
-              <a:tr h="457200">
+              <a:tr h="411480">
                 <a:tc>
                   <a:txBody>
                     <a:bodyPr/>
                     <a:lstStyle/>
                     <a:p>
                       <a:r>
-                        <a:rPr sz="1500" b="0">
+                        <a:rPr sz="1400" b="0">
                           <a:solidFill>
                             <a:srgbClr val="0B1F3A"/>
                           </a:solidFill>
@@ -8044,13 +8847,13 @@
                     <a:lstStyle/>
                     <a:p>
                       <a:r>
-                        <a:rPr sz="1500" b="0">
+                        <a:rPr sz="1400" b="0">
                           <a:solidFill>
                             <a:srgbClr val="0B1F3A"/>
                           </a:solidFill>
                           <a:latin typeface="Segoe UI"/>
                         </a:rPr>
-                        <a:t>Los datos de pagos, proveedor, contabilidad e incidencias, con la hora de carga</a:t>
+                        <a:t>Se ven los datos de pagos, proveedor, contabilidad e incidencias, con la hora de carga</a:t>
                       </a:r>
                     </a:p>
                   </a:txBody>
@@ -8061,14 +8864,14 @@
                   </a:tcPr>
                 </a:tc>
               </a:tr>
-              <a:tr h="457200">
+              <a:tr h="411480">
                 <a:tc>
                   <a:txBody>
                     <a:bodyPr/>
                     <a:lstStyle/>
                     <a:p>
                       <a:r>
-                        <a:rPr sz="1500" b="0">
+                        <a:rPr sz="1400" b="0">
                           <a:solidFill>
                             <a:srgbClr val="0B1F3A"/>
                           </a:solidFill>
@@ -8090,7 +8893,7 @@
                     <a:lstStyle/>
                     <a:p>
                       <a:r>
-                        <a:rPr sz="1500" b="0">
+                        <a:rPr sz="1400" b="0">
                           <a:solidFill>
                             <a:srgbClr val="0B1F3A"/>
                           </a:solidFill>
@@ -8107,14 +8910,14 @@
                   </a:tcPr>
                 </a:tc>
               </a:tr>
-              <a:tr h="457200">
+              <a:tr h="411480">
                 <a:tc>
                   <a:txBody>
                     <a:bodyPr/>
                     <a:lstStyle/>
                     <a:p>
                       <a:r>
-                        <a:rPr sz="1500" b="0">
+                        <a:rPr sz="1400" b="0">
                           <a:solidFill>
                             <a:srgbClr val="0B1F3A"/>
                           </a:solidFill>
@@ -8136,13 +8939,13 @@
                     <a:lstStyle/>
                     <a:p>
                       <a:r>
-                        <a:rPr sz="1500" b="0">
+                        <a:rPr sz="1400" b="0">
                           <a:solidFill>
                             <a:srgbClr val="0B1F3A"/>
                           </a:solidFill>
                           <a:latin typeface="Segoe UI"/>
                         </a:rPr>
-                        <a:t>Para cada operación: qué dicen el wallet, el proveedor y la contabilidad</a:t>
+                        <a:t>Por operación: qué dicen el wallet, el proveedor y la contabilidad</a:t>
                       </a:r>
                     </a:p>
                   </a:txBody>
@@ -8153,14 +8956,14 @@
                   </a:tcPr>
                 </a:tc>
               </a:tr>
-              <a:tr h="457200">
+              <a:tr h="411480">
                 <a:tc>
                   <a:txBody>
                     <a:bodyPr/>
                     <a:lstStyle/>
                     <a:p>
                       <a:r>
-                        <a:rPr sz="1500" b="0">
+                        <a:rPr sz="1400" b="0">
                           <a:solidFill>
                             <a:srgbClr val="0B1F3A"/>
                           </a:solidFill>
@@ -8182,13 +8985,13 @@
                     <a:lstStyle/>
                     <a:p>
                       <a:r>
-                        <a:rPr sz="1500" b="0">
+                        <a:rPr sz="1400" b="0">
                           <a:solidFill>
                             <a:srgbClr val="0B1F3A"/>
                           </a:solidFill>
                           <a:latin typeface="Segoe UI"/>
                         </a:rPr>
-                        <a:t>Inicia la atención, la envía a revisión; el supervisor aprueba o devuelve con nota</a:t>
+                        <a:t>El analista inicia la atención y, al terminar, escribe su respuesta (obligatoria) y la envía a revisión</a:t>
                       </a:r>
                     </a:p>
                   </a:txBody>
@@ -8199,14 +9002,14 @@
                   </a:tcPr>
                 </a:tc>
               </a:tr>
-              <a:tr h="457200">
+              <a:tr h="411480">
                 <a:tc>
                   <a:txBody>
                     <a:bodyPr/>
                     <a:lstStyle/>
                     <a:p>
                       <a:r>
-                        <a:rPr sz="1500" b="0">
+                        <a:rPr sz="1400" b="0">
                           <a:solidFill>
                             <a:srgbClr val="0B1F3A"/>
                           </a:solidFill>
@@ -8228,13 +9031,13 @@
                     <a:lstStyle/>
                     <a:p>
                       <a:r>
-                        <a:rPr sz="1500" b="0">
+                        <a:rPr sz="1400" b="0">
                           <a:solidFill>
                             <a:srgbClr val="0B1F3A"/>
                           </a:solidFill>
                           <a:latin typeface="Segoe UI"/>
                         </a:rPr>
-                        <a:t>Cambia lo que reporta el proveedor y concilia de nuevo para ver el efecto</a:t>
+                        <a:t>Con cada cambio de estado, el agente lee los pagos y deja un mensaje breve sobre el problema</a:t>
                       </a:r>
                     </a:p>
                   </a:txBody>
@@ -8245,20 +9048,66 @@
                   </a:tcPr>
                 </a:tc>
               </a:tr>
+              <a:tr h="411480">
+                <a:tc>
+                  <a:txBody>
+                    <a:bodyPr/>
+                    <a:lstStyle/>
+                    <a:p>
+                      <a:r>
+                        <a:rPr sz="1400" b="0">
+                          <a:solidFill>
+                            <a:srgbClr val="0B1F3A"/>
+                          </a:solidFill>
+                          <a:latin typeface="Segoe UI"/>
+                        </a:rPr>
+                        <a:t>6</a:t>
+                      </a:r>
+                    </a:p>
+                  </a:txBody>
+                  <a:tcPr anchor="ctr">
+                    <a:solidFill>
+                      <a:srgbClr val="FFFFFF"/>
+                    </a:solidFill>
+                  </a:tcPr>
+                </a:tc>
+                <a:tc>
+                  <a:txBody>
+                    <a:bodyPr/>
+                    <a:lstStyle/>
+                    <a:p>
+                      <a:r>
+                        <a:rPr sz="1400" b="0">
+                          <a:solidFill>
+                            <a:srgbClr val="0B1F3A"/>
+                          </a:solidFill>
+                          <a:latin typeface="Segoe UI"/>
+                        </a:rPr>
+                        <a:t>El supervisor lee el mensaje, aprueba o devuelve con nota; el API no cambia</a:t>
+                      </a:r>
+                    </a:p>
+                  </a:txBody>
+                  <a:tcPr anchor="ctr">
+                    <a:solidFill>
+                      <a:srgbClr val="FFFFFF"/>
+                    </a:solidFill>
+                  </a:tcPr>
+                </a:tc>
+              </a:tr>
             </a:tbl>
           </a:graphicData>
         </a:graphic>
       </p:graphicFrame>
       <p:sp>
         <p:nvSpPr>
-          <p:cNvPr id="16" name="TextBox 15"/>
+          <p:cNvPr id="18" name="TextBox 17"/>
           <p:cNvSpPr txBox="1"/>
           <p:nvPr/>
         </p:nvSpPr>
         <p:spPr>
           <a:xfrm>
-            <a:off x="457200" y="6355080"/>
-            <a:ext cx="11247120" cy="365760"/>
+            <a:off x="457200" y="6217920"/>
+            <a:ext cx="11247120" cy="457200"/>
           </a:xfrm>
           <a:prstGeom prst="rect">
             <a:avLst/>
@@ -8420,6 +9269,771 @@
                 </a:solidFill>
                 <a:latin typeface="Segoe UI"/>
               </a:rPr>
+              <a:t>El agente supervisor: menos fatiga al decidir</a:t>
+            </a:r>
+          </a:p>
+        </p:txBody>
+      </p:sp>
+      <p:sp>
+        <p:nvSpPr>
+          <p:cNvPr id="5" name="TextBox 4"/>
+          <p:cNvSpPr txBox="1"/>
+          <p:nvPr/>
+        </p:nvSpPr>
+        <p:spPr>
+          <a:xfrm>
+            <a:off x="457200" y="1188720"/>
+            <a:ext cx="11247120" cy="457200"/>
+          </a:xfrm>
+          <a:prstGeom prst="rect">
+            <a:avLst/>
+          </a:prstGeom>
+          <a:noFill/>
+        </p:spPr>
+        <p:txBody>
+          <a:bodyPr wrap="square" anchor="t">
+            <a:spAutoFit/>
+          </a:bodyPr>
+          <a:lstStyle/>
+          <a:p>
+            <a:pPr algn="l"/>
+            <a:r>
+              <a:rPr sz="1600" b="0">
+                <a:solidFill>
+                  <a:srgbClr val="5B6678"/>
+                </a:solidFill>
+                <a:latin typeface="Segoe UI"/>
+              </a:rPr>
+              <a:t>Antes el supervisor reconstruía cada caso a mano; ahora recibe un resumen listo.</a:t>
+            </a:r>
+          </a:p>
+        </p:txBody>
+      </p:sp>
+      <p:sp>
+        <p:nvSpPr>
+          <p:cNvPr id="6" name="Rectangle 5"/>
+          <p:cNvSpPr/>
+          <p:nvPr/>
+        </p:nvSpPr>
+        <p:spPr>
+          <a:xfrm>
+            <a:off x="457200" y="1737360"/>
+            <a:ext cx="5486400" cy="2148840"/>
+          </a:xfrm>
+          <a:prstGeom prst="rect">
+            <a:avLst/>
+          </a:prstGeom>
+          <a:solidFill>
+            <a:srgbClr val="F4F6FA"/>
+          </a:solidFill>
+          <a:ln>
+            <a:noFill/>
+          </a:ln>
+          <a:effectLst/>
+        </p:spPr>
+        <p:style>
+          <a:lnRef idx="1">
+            <a:schemeClr val="accent1"/>
+          </a:lnRef>
+          <a:fillRef idx="3">
+            <a:schemeClr val="accent1"/>
+          </a:fillRef>
+          <a:effectRef idx="2">
+            <a:schemeClr val="accent1"/>
+          </a:effectRef>
+          <a:fontRef idx="minor">
+            <a:schemeClr val="lt1"/>
+          </a:fontRef>
+        </p:style>
+        <p:txBody>
+          <a:bodyPr rtlCol="0" anchor="ctr"/>
+          <a:lstStyle/>
+          <a:p>
+            <a:pPr algn="ctr"/>
+          </a:p>
+        </p:txBody>
+      </p:sp>
+      <p:sp>
+        <p:nvSpPr>
+          <p:cNvPr id="7" name="Rectangle 6"/>
+          <p:cNvSpPr/>
+          <p:nvPr/>
+        </p:nvSpPr>
+        <p:spPr>
+          <a:xfrm>
+            <a:off x="457200" y="1737360"/>
+            <a:ext cx="73152" cy="2148840"/>
+          </a:xfrm>
+          <a:prstGeom prst="rect">
+            <a:avLst/>
+          </a:prstGeom>
+          <a:solidFill>
+            <a:srgbClr val="FF7A1A"/>
+          </a:solidFill>
+          <a:ln>
+            <a:noFill/>
+          </a:ln>
+          <a:effectLst/>
+        </p:spPr>
+        <p:style>
+          <a:lnRef idx="1">
+            <a:schemeClr val="accent1"/>
+          </a:lnRef>
+          <a:fillRef idx="3">
+            <a:schemeClr val="accent1"/>
+          </a:fillRef>
+          <a:effectRef idx="2">
+            <a:schemeClr val="accent1"/>
+          </a:effectRef>
+          <a:fontRef idx="minor">
+            <a:schemeClr val="lt1"/>
+          </a:fontRef>
+        </p:style>
+        <p:txBody>
+          <a:bodyPr rtlCol="0" anchor="ctr"/>
+          <a:lstStyle/>
+          <a:p>
+            <a:pPr algn="ctr"/>
+          </a:p>
+        </p:txBody>
+      </p:sp>
+      <p:sp>
+        <p:nvSpPr>
+          <p:cNvPr id="8" name="TextBox 7"/>
+          <p:cNvSpPr txBox="1"/>
+          <p:nvPr/>
+        </p:nvSpPr>
+        <p:spPr>
+          <a:xfrm>
+            <a:off x="640080" y="1810512"/>
+            <a:ext cx="5212080" cy="411480"/>
+          </a:xfrm>
+          <a:prstGeom prst="rect">
+            <a:avLst/>
+          </a:prstGeom>
+          <a:noFill/>
+        </p:spPr>
+        <p:txBody>
+          <a:bodyPr wrap="square" anchor="t">
+            <a:spAutoFit/>
+          </a:bodyPr>
+          <a:lstStyle/>
+          <a:p>
+            <a:pPr algn="l"/>
+            <a:r>
+              <a:rPr sz="1700" b="1">
+                <a:solidFill>
+                  <a:srgbClr val="0B1F3A"/>
+                </a:solidFill>
+                <a:latin typeface="Segoe UI"/>
+              </a:rPr>
+              <a:t>Qué hace</a:t>
+            </a:r>
+          </a:p>
+        </p:txBody>
+      </p:sp>
+      <p:sp>
+        <p:nvSpPr>
+          <p:cNvPr id="9" name="TextBox 8"/>
+          <p:cNvSpPr txBox="1"/>
+          <p:nvPr/>
+        </p:nvSpPr>
+        <p:spPr>
+          <a:xfrm>
+            <a:off x="640080" y="2267712"/>
+            <a:ext cx="5212080" cy="1554480"/>
+          </a:xfrm>
+          <a:prstGeom prst="rect">
+            <a:avLst/>
+          </a:prstGeom>
+          <a:noFill/>
+        </p:spPr>
+        <p:txBody>
+          <a:bodyPr wrap="square" anchor="t">
+            <a:spAutoFit/>
+          </a:bodyPr>
+          <a:lstStyle/>
+          <a:p>
+            <a:pPr algn="l"/>
+            <a:r>
+              <a:rPr sz="1400" b="0">
+                <a:solidFill>
+                  <a:srgbClr val="5B6678"/>
+                </a:solidFill>
+                <a:latin typeface="Segoe UI"/>
+              </a:rPr>
+              <a:t>Se activa solo cuando el analista inicia la atención o envía a revisión.</a:t>
+            </a:r>
+          </a:p>
+          <a:p>
+            <a:pPr algn="l">
+              <a:spcBef>
+                <a:spcPts val="600"/>
+              </a:spcBef>
+            </a:pPr>
+            <a:r>
+              <a:rPr sz="1400" b="0">
+                <a:solidFill>
+                  <a:srgbClr val="5B6678"/>
+                </a:solidFill>
+                <a:latin typeface="Segoe UI"/>
+              </a:rPr>
+              <a:t>Lee los pagos, el reporte del proveedor y la contabilidad del caso.</a:t>
+            </a:r>
+          </a:p>
+          <a:p>
+            <a:pPr algn="l">
+              <a:spcBef>
+                <a:spcPts val="600"/>
+              </a:spcBef>
+            </a:pPr>
+            <a:r>
+              <a:rPr sz="1400" b="0">
+                <a:solidFill>
+                  <a:srgbClr val="5B6678"/>
+                </a:solidFill>
+                <a:latin typeface="Segoe UI"/>
+              </a:rPr>
+              <a:t>Deja un mensaje y, al enviar a revisión, contrasta la respuesta del analista con los datos.</a:t>
+            </a:r>
+          </a:p>
+        </p:txBody>
+      </p:sp>
+      <p:sp>
+        <p:nvSpPr>
+          <p:cNvPr id="10" name="Rectangle 9"/>
+          <p:cNvSpPr/>
+          <p:nvPr/>
+        </p:nvSpPr>
+        <p:spPr>
+          <a:xfrm>
+            <a:off x="6217920" y="1737360"/>
+            <a:ext cx="5486400" cy="2148840"/>
+          </a:xfrm>
+          <a:prstGeom prst="rect">
+            <a:avLst/>
+          </a:prstGeom>
+          <a:solidFill>
+            <a:srgbClr val="F4F6FA"/>
+          </a:solidFill>
+          <a:ln>
+            <a:noFill/>
+          </a:ln>
+          <a:effectLst/>
+        </p:spPr>
+        <p:style>
+          <a:lnRef idx="1">
+            <a:schemeClr val="accent1"/>
+          </a:lnRef>
+          <a:fillRef idx="3">
+            <a:schemeClr val="accent1"/>
+          </a:fillRef>
+          <a:effectRef idx="2">
+            <a:schemeClr val="accent1"/>
+          </a:effectRef>
+          <a:fontRef idx="minor">
+            <a:schemeClr val="lt1"/>
+          </a:fontRef>
+        </p:style>
+        <p:txBody>
+          <a:bodyPr rtlCol="0" anchor="ctr"/>
+          <a:lstStyle/>
+          <a:p>
+            <a:pPr algn="ctr"/>
+          </a:p>
+        </p:txBody>
+      </p:sp>
+      <p:sp>
+        <p:nvSpPr>
+          <p:cNvPr id="11" name="Rectangle 10"/>
+          <p:cNvSpPr/>
+          <p:nvPr/>
+        </p:nvSpPr>
+        <p:spPr>
+          <a:xfrm>
+            <a:off x="6217920" y="1737360"/>
+            <a:ext cx="73152" cy="2148840"/>
+          </a:xfrm>
+          <a:prstGeom prst="rect">
+            <a:avLst/>
+          </a:prstGeom>
+          <a:solidFill>
+            <a:srgbClr val="2D6CDF"/>
+          </a:solidFill>
+          <a:ln>
+            <a:noFill/>
+          </a:ln>
+          <a:effectLst/>
+        </p:spPr>
+        <p:style>
+          <a:lnRef idx="1">
+            <a:schemeClr val="accent1"/>
+          </a:lnRef>
+          <a:fillRef idx="3">
+            <a:schemeClr val="accent1"/>
+          </a:fillRef>
+          <a:effectRef idx="2">
+            <a:schemeClr val="accent1"/>
+          </a:effectRef>
+          <a:fontRef idx="minor">
+            <a:schemeClr val="lt1"/>
+          </a:fontRef>
+        </p:style>
+        <p:txBody>
+          <a:bodyPr rtlCol="0" anchor="ctr"/>
+          <a:lstStyle/>
+          <a:p>
+            <a:pPr algn="ctr"/>
+          </a:p>
+        </p:txBody>
+      </p:sp>
+      <p:sp>
+        <p:nvSpPr>
+          <p:cNvPr id="12" name="TextBox 11"/>
+          <p:cNvSpPr txBox="1"/>
+          <p:nvPr/>
+        </p:nvSpPr>
+        <p:spPr>
+          <a:xfrm>
+            <a:off x="6400800" y="1810512"/>
+            <a:ext cx="5212080" cy="411480"/>
+          </a:xfrm>
+          <a:prstGeom prst="rect">
+            <a:avLst/>
+          </a:prstGeom>
+          <a:noFill/>
+        </p:spPr>
+        <p:txBody>
+          <a:bodyPr wrap="square" anchor="t">
+            <a:spAutoFit/>
+          </a:bodyPr>
+          <a:lstStyle/>
+          <a:p>
+            <a:pPr algn="l"/>
+            <a:r>
+              <a:rPr sz="1700" b="1">
+                <a:solidFill>
+                  <a:srgbClr val="0B1F3A"/>
+                </a:solidFill>
+                <a:latin typeface="Segoe UI"/>
+              </a:rPr>
+              <a:t>Qué contiene el mensaje</a:t>
+            </a:r>
+          </a:p>
+        </p:txBody>
+      </p:sp>
+      <p:sp>
+        <p:nvSpPr>
+          <p:cNvPr id="13" name="TextBox 12"/>
+          <p:cNvSpPr txBox="1"/>
+          <p:nvPr/>
+        </p:nvSpPr>
+        <p:spPr>
+          <a:xfrm>
+            <a:off x="6400800" y="2267712"/>
+            <a:ext cx="5212080" cy="1554480"/>
+          </a:xfrm>
+          <a:prstGeom prst="rect">
+            <a:avLst/>
+          </a:prstGeom>
+          <a:noFill/>
+        </p:spPr>
+        <p:txBody>
+          <a:bodyPr wrap="square" anchor="t">
+            <a:spAutoFit/>
+          </a:bodyPr>
+          <a:lstStyle/>
+          <a:p>
+            <a:pPr algn="l"/>
+            <a:r>
+              <a:rPr sz="1400" b="0">
+                <a:solidFill>
+                  <a:srgbClr val="5B6678"/>
+                </a:solidFill>
+                <a:latin typeface="Segoe UI"/>
+              </a:rPr>
+              <a:t>Prioridad y titular del problema</a:t>
+            </a:r>
+          </a:p>
+          <a:p>
+            <a:pPr algn="l">
+              <a:spcBef>
+                <a:spcPts val="600"/>
+              </a:spcBef>
+            </a:pPr>
+            <a:r>
+              <a:rPr sz="1400" b="0">
+                <a:solidFill>
+                  <a:srgbClr val="5B6678"/>
+                </a:solidFill>
+                <a:latin typeface="Segoe UI"/>
+              </a:rPr>
+              <a:t>Explicación en lenguaje de negocio</a:t>
+            </a:r>
+          </a:p>
+          <a:p>
+            <a:pPr algn="l">
+              <a:spcBef>
+                <a:spcPts val="600"/>
+              </a:spcBef>
+            </a:pPr>
+            <a:r>
+              <a:rPr sz="1400" b="0">
+                <a:solidFill>
+                  <a:srgbClr val="5B6678"/>
+                </a:solidFill>
+                <a:latin typeface="Segoe UI"/>
+              </a:rPr>
+              <a:t>Evidencia: lo que dicen wallet, proveedor y ledger</a:t>
+            </a:r>
+          </a:p>
+          <a:p>
+            <a:pPr algn="l">
+              <a:spcBef>
+                <a:spcPts val="600"/>
+              </a:spcBef>
+            </a:pPr>
+            <a:r>
+              <a:rPr sz="1400" b="0">
+                <a:solidFill>
+                  <a:srgbClr val="5B6678"/>
+                </a:solidFill>
+                <a:latin typeface="Segoe UI"/>
+              </a:rPr>
+              <a:t>Qué debe decidir el supervisor</a:t>
+            </a:r>
+          </a:p>
+        </p:txBody>
+      </p:sp>
+      <p:sp>
+        <p:nvSpPr>
+          <p:cNvPr id="14" name="Rectangle 13"/>
+          <p:cNvSpPr/>
+          <p:nvPr/>
+        </p:nvSpPr>
+        <p:spPr>
+          <a:xfrm>
+            <a:off x="457200" y="4114800"/>
+            <a:ext cx="11247120" cy="1463040"/>
+          </a:xfrm>
+          <a:prstGeom prst="rect">
+            <a:avLst/>
+          </a:prstGeom>
+          <a:solidFill>
+            <a:srgbClr val="F4F6FA"/>
+          </a:solidFill>
+          <a:ln>
+            <a:noFill/>
+          </a:ln>
+          <a:effectLst/>
+        </p:spPr>
+        <p:style>
+          <a:lnRef idx="1">
+            <a:schemeClr val="accent1"/>
+          </a:lnRef>
+          <a:fillRef idx="3">
+            <a:schemeClr val="accent1"/>
+          </a:fillRef>
+          <a:effectRef idx="2">
+            <a:schemeClr val="accent1"/>
+          </a:effectRef>
+          <a:fontRef idx="minor">
+            <a:schemeClr val="lt1"/>
+          </a:fontRef>
+        </p:style>
+        <p:txBody>
+          <a:bodyPr rtlCol="0" anchor="ctr"/>
+          <a:lstStyle/>
+          <a:p>
+            <a:pPr algn="ctr"/>
+          </a:p>
+        </p:txBody>
+      </p:sp>
+      <p:sp>
+        <p:nvSpPr>
+          <p:cNvPr id="15" name="Rectangle 14"/>
+          <p:cNvSpPr/>
+          <p:nvPr/>
+        </p:nvSpPr>
+        <p:spPr>
+          <a:xfrm>
+            <a:off x="457200" y="4114800"/>
+            <a:ext cx="73152" cy="1463040"/>
+          </a:xfrm>
+          <a:prstGeom prst="rect">
+            <a:avLst/>
+          </a:prstGeom>
+          <a:solidFill>
+            <a:srgbClr val="1E9E6A"/>
+          </a:solidFill>
+          <a:ln>
+            <a:noFill/>
+          </a:ln>
+          <a:effectLst/>
+        </p:spPr>
+        <p:style>
+          <a:lnRef idx="1">
+            <a:schemeClr val="accent1"/>
+          </a:lnRef>
+          <a:fillRef idx="3">
+            <a:schemeClr val="accent1"/>
+          </a:fillRef>
+          <a:effectRef idx="2">
+            <a:schemeClr val="accent1"/>
+          </a:effectRef>
+          <a:fontRef idx="minor">
+            <a:schemeClr val="lt1"/>
+          </a:fontRef>
+        </p:style>
+        <p:txBody>
+          <a:bodyPr rtlCol="0" anchor="ctr"/>
+          <a:lstStyle/>
+          <a:p>
+            <a:pPr algn="ctr"/>
+          </a:p>
+        </p:txBody>
+      </p:sp>
+      <p:sp>
+        <p:nvSpPr>
+          <p:cNvPr id="16" name="TextBox 15"/>
+          <p:cNvSpPr txBox="1"/>
+          <p:nvPr/>
+        </p:nvSpPr>
+        <p:spPr>
+          <a:xfrm>
+            <a:off x="640080" y="4160520"/>
+            <a:ext cx="10972800" cy="365760"/>
+          </a:xfrm>
+          <a:prstGeom prst="rect">
+            <a:avLst/>
+          </a:prstGeom>
+          <a:noFill/>
+        </p:spPr>
+        <p:txBody>
+          <a:bodyPr wrap="square" anchor="t">
+            <a:spAutoFit/>
+          </a:bodyPr>
+          <a:lstStyle/>
+          <a:p>
+            <a:pPr algn="l"/>
+            <a:r>
+              <a:rPr sz="1600" b="1">
+                <a:solidFill>
+                  <a:srgbClr val="0B1F3A"/>
+                </a:solidFill>
+                <a:latin typeface="Segoe UI"/>
+              </a:rPr>
+              <a:t>Ejemplo real de la demo</a:t>
+            </a:r>
+          </a:p>
+        </p:txBody>
+      </p:sp>
+      <p:sp>
+        <p:nvSpPr>
+          <p:cNvPr id="17" name="TextBox 16"/>
+          <p:cNvSpPr txBox="1"/>
+          <p:nvPr/>
+        </p:nvSpPr>
+        <p:spPr>
+          <a:xfrm>
+            <a:off x="640080" y="4526280"/>
+            <a:ext cx="10881360" cy="1097280"/>
+          </a:xfrm>
+          <a:prstGeom prst="rect">
+            <a:avLst/>
+          </a:prstGeom>
+          <a:noFill/>
+        </p:spPr>
+        <p:txBody>
+          <a:bodyPr wrap="square" anchor="t">
+            <a:spAutoFit/>
+          </a:bodyPr>
+          <a:lstStyle/>
+          <a:p>
+            <a:pPr algn="l"/>
+            <a:r>
+              <a:rPr sz="1400" b="0">
+                <a:solidFill>
+                  <a:srgbClr val="5B6678"/>
+                </a:solidFill>
+                <a:latin typeface="Segoe UI"/>
+              </a:rPr>
+              <a:t>«Pago con diferencia: la wallet registra S/ 3.25 y el proveedor S/ 9.99 (diferencia S/ 6.74). El analista dice que corrigió el monto, pero los datos siguen sin coincidir: pide la confirmación del proveedor antes de aprobar.»</a:t>
+            </a:r>
+          </a:p>
+        </p:txBody>
+      </p:sp>
+      <p:sp>
+        <p:nvSpPr>
+          <p:cNvPr id="18" name="TextBox 17"/>
+          <p:cNvSpPr txBox="1"/>
+          <p:nvPr/>
+        </p:nvSpPr>
+        <p:spPr>
+          <a:xfrm>
+            <a:off x="457200" y="5760720"/>
+            <a:ext cx="11247120" cy="822960"/>
+          </a:xfrm>
+          <a:prstGeom prst="rect">
+            <a:avLst/>
+          </a:prstGeom>
+          <a:noFill/>
+        </p:spPr>
+        <p:txBody>
+          <a:bodyPr wrap="square" anchor="t">
+            <a:spAutoFit/>
+          </a:bodyPr>
+          <a:lstStyle/>
+          <a:p>
+            <a:pPr algn="l"/>
+            <a:r>
+              <a:rPr sz="1400" b="1">
+                <a:solidFill>
+                  <a:srgbClr val="FF7A1A"/>
+                </a:solidFill>
+                <a:latin typeface="Segoe UI"/>
+              </a:rPr>
+              <a:t>Usa Claude Sonnet 5.5 con la cuenta de GitHub del equipo. Si la IA no está disponible, el mensaje se genera sin IA y así se indica; el flujo nunca se bloquea.</a:t>
+            </a:r>
+          </a:p>
+        </p:txBody>
+      </p:sp>
+    </p:spTree>
+  </p:cSld>
+  <p:clrMapOvr>
+    <a:masterClrMapping/>
+  </p:clrMapOvr>
+</p:sld>
+</file>
+
+<file path=ppt/slides/slide8.xml><?xml version="1.0" encoding="utf-8"?>
+<p:sld xmlns:a="http://schemas.openxmlformats.org/drawingml/2006/main" xmlns:p="http://schemas.openxmlformats.org/presentationml/2006/main" xmlns:r="http://schemas.openxmlformats.org/officeDocument/2006/relationships">
+  <p:cSld>
+    <p:spTree>
+      <p:nvGrpSpPr>
+        <p:cNvPr id="1" name=""/>
+        <p:cNvGrpSpPr/>
+        <p:nvPr/>
+      </p:nvGrpSpPr>
+      <p:grpSpPr/>
+      <p:sp>
+        <p:nvSpPr>
+          <p:cNvPr id="2" name="Rectangle 1"/>
+          <p:cNvSpPr/>
+          <p:nvPr/>
+        </p:nvSpPr>
+        <p:spPr>
+          <a:xfrm>
+            <a:off x="0" y="0"/>
+            <a:ext cx="12191695" cy="1051560"/>
+          </a:xfrm>
+          <a:prstGeom prst="rect">
+            <a:avLst/>
+          </a:prstGeom>
+          <a:solidFill>
+            <a:srgbClr val="0B1F3A"/>
+          </a:solidFill>
+          <a:ln>
+            <a:noFill/>
+          </a:ln>
+          <a:effectLst/>
+        </p:spPr>
+        <p:style>
+          <a:lnRef idx="1">
+            <a:schemeClr val="accent1"/>
+          </a:lnRef>
+          <a:fillRef idx="3">
+            <a:schemeClr val="accent1"/>
+          </a:fillRef>
+          <a:effectRef idx="2">
+            <a:schemeClr val="accent1"/>
+          </a:effectRef>
+          <a:fontRef idx="minor">
+            <a:schemeClr val="lt1"/>
+          </a:fontRef>
+        </p:style>
+        <p:txBody>
+          <a:bodyPr rtlCol="0" anchor="ctr"/>
+          <a:lstStyle/>
+          <a:p>
+            <a:pPr algn="ctr"/>
+          </a:p>
+        </p:txBody>
+      </p:sp>
+      <p:sp>
+        <p:nvSpPr>
+          <p:cNvPr id="3" name="Rectangle 2"/>
+          <p:cNvSpPr/>
+          <p:nvPr/>
+        </p:nvSpPr>
+        <p:spPr>
+          <a:xfrm>
+            <a:off x="0" y="1051560"/>
+            <a:ext cx="12191695" cy="54864"/>
+          </a:xfrm>
+          <a:prstGeom prst="rect">
+            <a:avLst/>
+          </a:prstGeom>
+          <a:solidFill>
+            <a:srgbClr val="FF7A1A"/>
+          </a:solidFill>
+          <a:ln>
+            <a:noFill/>
+          </a:ln>
+          <a:effectLst/>
+        </p:spPr>
+        <p:style>
+          <a:lnRef idx="1">
+            <a:schemeClr val="accent1"/>
+          </a:lnRef>
+          <a:fillRef idx="3">
+            <a:schemeClr val="accent1"/>
+          </a:fillRef>
+          <a:effectRef idx="2">
+            <a:schemeClr val="accent1"/>
+          </a:effectRef>
+          <a:fontRef idx="minor">
+            <a:schemeClr val="lt1"/>
+          </a:fontRef>
+        </p:style>
+        <p:txBody>
+          <a:bodyPr rtlCol="0" anchor="ctr"/>
+          <a:lstStyle/>
+          <a:p>
+            <a:pPr algn="ctr"/>
+          </a:p>
+        </p:txBody>
+      </p:sp>
+      <p:sp>
+        <p:nvSpPr>
+          <p:cNvPr id="4" name="TextBox 3"/>
+          <p:cNvSpPr txBox="1"/>
+          <p:nvPr/>
+        </p:nvSpPr>
+        <p:spPr>
+          <a:xfrm>
+            <a:off x="457200" y="164592"/>
+            <a:ext cx="11247120" cy="731520"/>
+          </a:xfrm>
+          <a:prstGeom prst="rect">
+            <a:avLst/>
+          </a:prstGeom>
+          <a:noFill/>
+        </p:spPr>
+        <p:txBody>
+          <a:bodyPr wrap="square" anchor="ctr">
+            <a:spAutoFit/>
+          </a:bodyPr>
+          <a:lstStyle/>
+          <a:p>
+            <a:pPr algn="l"/>
+            <a:r>
+              <a:rPr sz="3000" b="1">
+                <a:solidFill>
+                  <a:srgbClr val="FFFFFF"/>
+                </a:solidFill>
+                <a:latin typeface="Segoe UI"/>
+              </a:rPr>
               <a:t>Agentes de IA utilizados</a:t>
             </a:r>
           </a:p>
@@ -8434,8 +10048,8 @@
           <p:nvPr/>
         </p:nvGraphicFramePr>
         <p:xfrm>
-          <a:off x="457200" y="1371600"/>
-          <a:ext cx="11247119" cy="3017520"/>
+          <a:off x="457200" y="1325880"/>
+          <a:ext cx="11247120" cy="3200400"/>
         </p:xfrm>
         <a:graphic>
           <a:graphicData uri="http://schemas.openxmlformats.org/drawingml/2006/table">
@@ -8444,17 +10058,17 @@
                 <a:tableStyleId>{5C22544A-7EE6-4342-B048-85BDC9FD1C3A}</a:tableStyleId>
               </a:tblPr>
               <a:tblGrid>
-                <a:gridCol w="3291840"/>
-                <a:gridCol w="7955279"/>
+                <a:gridCol w="4206240"/>
+                <a:gridCol w="7040880"/>
               </a:tblGrid>
-              <a:tr h="502920">
+              <a:tr h="457200">
                 <a:tc>
                   <a:txBody>
                     <a:bodyPr/>
                     <a:lstStyle/>
                     <a:p>
                       <a:r>
-                        <a:rPr sz="1500" b="1">
+                        <a:rPr sz="1400" b="1">
                           <a:solidFill>
                             <a:srgbClr val="FFFFFF"/>
                           </a:solidFill>
@@ -8476,7 +10090,7 @@
                     <a:lstStyle/>
                     <a:p>
                       <a:r>
-                        <a:rPr sz="1500" b="1">
+                        <a:rPr sz="1400" b="1">
                           <a:solidFill>
                             <a:srgbClr val="FFFFFF"/>
                           </a:solidFill>
@@ -8493,14 +10107,14 @@
                   </a:tcPr>
                 </a:tc>
               </a:tr>
-              <a:tr h="502920">
+              <a:tr h="457200">
                 <a:tc>
                   <a:txBody>
                     <a:bodyPr/>
                     <a:lstStyle/>
                     <a:p>
                       <a:r>
-                        <a:rPr sz="1500" b="0">
+                        <a:rPr sz="1400" b="0">
                           <a:solidFill>
                             <a:srgbClr val="0B1F3A"/>
                           </a:solidFill>
@@ -8522,7 +10136,7 @@
                     <a:lstStyle/>
                     <a:p>
                       <a:r>
-                        <a:rPr sz="1500" b="0">
+                        <a:rPr sz="1400" b="0">
                           <a:solidFill>
                             <a:srgbClr val="0B1F3A"/>
                           </a:solidFill>
@@ -8539,14 +10153,14 @@
                   </a:tcPr>
                 </a:tc>
               </a:tr>
-              <a:tr h="502920">
+              <a:tr h="457200">
                 <a:tc>
                   <a:txBody>
                     <a:bodyPr/>
                     <a:lstStyle/>
                     <a:p>
                       <a:r>
-                        <a:rPr sz="1500" b="0">
+                        <a:rPr sz="1400" b="0">
                           <a:solidFill>
                             <a:srgbClr val="0B1F3A"/>
                           </a:solidFill>
@@ -8568,7 +10182,7 @@
                     <a:lstStyle/>
                     <a:p>
                       <a:r>
-                        <a:rPr sz="1500" b="0">
+                        <a:rPr sz="1400" b="0">
                           <a:solidFill>
                             <a:srgbClr val="0B1F3A"/>
                           </a:solidFill>
@@ -8585,14 +10199,14 @@
                   </a:tcPr>
                 </a:tc>
               </a:tr>
-              <a:tr h="502920">
+              <a:tr h="457200">
                 <a:tc>
                   <a:txBody>
                     <a:bodyPr/>
                     <a:lstStyle/>
                     <a:p>
                       <a:r>
-                        <a:rPr sz="1500" b="0">
+                        <a:rPr sz="1400" b="0">
                           <a:solidFill>
                             <a:srgbClr val="0B1F3A"/>
                           </a:solidFill>
@@ -8614,7 +10228,7 @@
                     <a:lstStyle/>
                     <a:p>
                       <a:r>
-                        <a:rPr sz="1500" b="0">
+                        <a:rPr sz="1400" b="0">
                           <a:solidFill>
                             <a:srgbClr val="0B1F3A"/>
                           </a:solidFill>
@@ -8631,14 +10245,14 @@
                   </a:tcPr>
                 </a:tc>
               </a:tr>
-              <a:tr h="502920">
+              <a:tr h="457200">
                 <a:tc>
                   <a:txBody>
                     <a:bodyPr/>
                     <a:lstStyle/>
                     <a:p>
                       <a:r>
-                        <a:rPr sz="1500" b="0">
+                        <a:rPr sz="1400" b="0">
                           <a:solidFill>
                             <a:srgbClr val="0B1F3A"/>
                           </a:solidFill>
@@ -8660,7 +10274,7 @@
                     <a:lstStyle/>
                     <a:p>
                       <a:r>
-                        <a:rPr sz="1500" b="0">
+                        <a:rPr sz="1400" b="0">
                           <a:solidFill>
                             <a:srgbClr val="0B1F3A"/>
                           </a:solidFill>
@@ -8677,14 +10291,14 @@
                   </a:tcPr>
                 </a:tc>
               </a:tr>
-              <a:tr h="502920">
+              <a:tr h="457200">
                 <a:tc>
                   <a:txBody>
                     <a:bodyPr/>
                     <a:lstStyle/>
                     <a:p>
                       <a:r>
-                        <a:rPr sz="1500" b="0">
+                        <a:rPr sz="1400" b="0">
                           <a:solidFill>
                             <a:srgbClr val="0B1F3A"/>
                           </a:solidFill>
@@ -8706,7 +10320,7 @@
                     <a:lstStyle/>
                     <a:p>
                       <a:r>
-                        <a:rPr sz="1500" b="0">
+                        <a:rPr sz="1400" b="0">
                           <a:solidFill>
                             <a:srgbClr val="0B1F3A"/>
                           </a:solidFill>
@@ -8723,6 +10337,52 @@
                   </a:tcPr>
                 </a:tc>
               </a:tr>
+              <a:tr h="457200">
+                <a:tc>
+                  <a:txBody>
+                    <a:bodyPr/>
+                    <a:lstStyle/>
+                    <a:p>
+                      <a:r>
+                        <a:rPr sz="1400" b="0">
+                          <a:solidFill>
+                            <a:srgbClr val="0B1F3A"/>
+                          </a:solidFill>
+                          <a:latin typeface="Segoe UI"/>
+                        </a:rPr>
+                        <a:t>Agente supervisor (en el producto)</a:t>
+                      </a:r>
+                    </a:p>
+                  </a:txBody>
+                  <a:tcPr anchor="ctr">
+                    <a:solidFill>
+                      <a:srgbClr val="FFFFFF"/>
+                    </a:solidFill>
+                  </a:tcPr>
+                </a:tc>
+                <a:tc>
+                  <a:txBody>
+                    <a:bodyPr/>
+                    <a:lstStyle/>
+                    <a:p>
+                      <a:r>
+                        <a:rPr sz="1400" b="0">
+                          <a:solidFill>
+                            <a:srgbClr val="0B1F3A"/>
+                          </a:solidFill>
+                          <a:latin typeface="Segoe UI"/>
+                        </a:rPr>
+                        <a:t>Resume cada caso para el supervisor (Claude Sonnet 5.5)</a:t>
+                      </a:r>
+                    </a:p>
+                  </a:txBody>
+                  <a:tcPr anchor="ctr">
+                    <a:solidFill>
+                      <a:srgbClr val="FFFFFF"/>
+                    </a:solidFill>
+                  </a:tcPr>
+                </a:tc>
+              </a:tr>
             </a:tbl>
           </a:graphicData>
         </a:graphic>
@@ -8736,8 +10396,8 @@
           <p:nvPr/>
         </p:nvGraphicFramePr>
         <p:xfrm>
-          <a:off x="457200" y="4572000"/>
-          <a:ext cx="11247120" cy="1828800"/>
+          <a:off x="457200" y="4754880"/>
+          <a:ext cx="11247120" cy="1645920"/>
         </p:xfrm>
         <a:graphic>
           <a:graphicData uri="http://schemas.openxmlformats.org/drawingml/2006/table">
@@ -8746,10 +10406,10 @@
                 <a:tableStyleId>{5C22544A-7EE6-4342-B048-85BDC9FD1C3A}</a:tableStyleId>
               </a:tblPr>
               <a:tblGrid>
-                <a:gridCol w="4572000"/>
-                <a:gridCol w="6675120"/>
+                <a:gridCol w="4206240"/>
+                <a:gridCol w="7040880"/>
               </a:tblGrid>
-              <a:tr h="457200">
+              <a:tr h="411480">
                 <a:tc>
                   <a:txBody>
                     <a:bodyPr/>
@@ -8795,7 +10455,7 @@
                   </a:tcPr>
                 </a:tc>
               </a:tr>
-              <a:tr h="457200">
+              <a:tr h="411480">
                 <a:tc>
                   <a:txBody>
                     <a:bodyPr/>
@@ -8841,7 +10501,7 @@
                   </a:tcPr>
                 </a:tc>
               </a:tr>
-              <a:tr h="457200">
+              <a:tr h="411480">
                 <a:tc>
                   <a:txBody>
                     <a:bodyPr/>
@@ -8854,7 +10514,7 @@
                           </a:solidFill>
                           <a:latin typeface="Segoe UI"/>
                         </a:rPr>
-                        <a:t>OpenSpec</a:t>
+                        <a:t>CrewAI + SDK de GitHub Copilot</a:t>
                       </a:r>
                     </a:p>
                   </a:txBody>
@@ -8876,7 +10536,7 @@
                           </a:solidFill>
                           <a:latin typeface="Segoe UI"/>
                         </a:rPr>
-                        <a:t>Specs y tareas de cada historia</a:t>
+                        <a:t>Orquesta el agente supervisor y accede al modelo</a:t>
                       </a:r>
                     </a:p>
                   </a:txBody>
@@ -8887,7 +10547,7 @@
                   </a:tcPr>
                 </a:tc>
               </a:tr>
-              <a:tr h="457200">
+              <a:tr h="411480">
                 <a:tc>
                   <a:txBody>
                     <a:bodyPr/>
@@ -8900,7 +10560,7 @@
                           </a:solidFill>
                           <a:latin typeface="Segoe UI"/>
                         </a:rPr>
-                        <a:t>GitHub Issues</a:t>
+                        <a:t>OpenSpec y GitHub Issues</a:t>
                       </a:r>
                     </a:p>
                   </a:txBody>
@@ -8922,7 +10582,7 @@
                           </a:solidFill>
                           <a:latin typeface="Segoe UI"/>
                         </a:rPr>
-                        <a:t>Fuente del alcance (#30 a #34)</a:t>
+                        <a:t>Specs, tareas y alcance (#30 a #34)</a:t>
                       </a:r>
                     </a:p>
                   </a:txBody>
@@ -8945,1159 +10605,6 @@
 </p:sld>
 </file>
 
-<file path=ppt/slides/slide8.xml><?xml version="1.0" encoding="utf-8"?>
-<p:sld xmlns:a="http://schemas.openxmlformats.org/drawingml/2006/main" xmlns:p="http://schemas.openxmlformats.org/presentationml/2006/main" xmlns:r="http://schemas.openxmlformats.org/officeDocument/2006/relationships">
-  <p:cSld>
-    <p:spTree>
-      <p:nvGrpSpPr>
-        <p:cNvPr id="1" name=""/>
-        <p:cNvGrpSpPr/>
-        <p:nvPr/>
-      </p:nvGrpSpPr>
-      <p:grpSpPr/>
-      <p:sp>
-        <p:nvSpPr>
-          <p:cNvPr id="2" name="Rectangle 1"/>
-          <p:cNvSpPr/>
-          <p:nvPr/>
-        </p:nvSpPr>
-        <p:spPr>
-          <a:xfrm>
-            <a:off x="0" y="0"/>
-            <a:ext cx="12191695" cy="1051560"/>
-          </a:xfrm>
-          <a:prstGeom prst="rect">
-            <a:avLst/>
-          </a:prstGeom>
-          <a:solidFill>
-            <a:srgbClr val="0B1F3A"/>
-          </a:solidFill>
-          <a:ln>
-            <a:noFill/>
-          </a:ln>
-          <a:effectLst/>
-        </p:spPr>
-        <p:style>
-          <a:lnRef idx="1">
-            <a:schemeClr val="accent1"/>
-          </a:lnRef>
-          <a:fillRef idx="3">
-            <a:schemeClr val="accent1"/>
-          </a:fillRef>
-          <a:effectRef idx="2">
-            <a:schemeClr val="accent1"/>
-          </a:effectRef>
-          <a:fontRef idx="minor">
-            <a:schemeClr val="lt1"/>
-          </a:fontRef>
-        </p:style>
-        <p:txBody>
-          <a:bodyPr rtlCol="0" anchor="ctr"/>
-          <a:lstStyle/>
-          <a:p>
-            <a:pPr algn="ctr"/>
-          </a:p>
-        </p:txBody>
-      </p:sp>
-      <p:sp>
-        <p:nvSpPr>
-          <p:cNvPr id="3" name="Rectangle 2"/>
-          <p:cNvSpPr/>
-          <p:nvPr/>
-        </p:nvSpPr>
-        <p:spPr>
-          <a:xfrm>
-            <a:off x="0" y="1051560"/>
-            <a:ext cx="12191695" cy="54864"/>
-          </a:xfrm>
-          <a:prstGeom prst="rect">
-            <a:avLst/>
-          </a:prstGeom>
-          <a:solidFill>
-            <a:srgbClr val="FF7A1A"/>
-          </a:solidFill>
-          <a:ln>
-            <a:noFill/>
-          </a:ln>
-          <a:effectLst/>
-        </p:spPr>
-        <p:style>
-          <a:lnRef idx="1">
-            <a:schemeClr val="accent1"/>
-          </a:lnRef>
-          <a:fillRef idx="3">
-            <a:schemeClr val="accent1"/>
-          </a:fillRef>
-          <a:effectRef idx="2">
-            <a:schemeClr val="accent1"/>
-          </a:effectRef>
-          <a:fontRef idx="minor">
-            <a:schemeClr val="lt1"/>
-          </a:fontRef>
-        </p:style>
-        <p:txBody>
-          <a:bodyPr rtlCol="0" anchor="ctr"/>
-          <a:lstStyle/>
-          <a:p>
-            <a:pPr algn="ctr"/>
-          </a:p>
-        </p:txBody>
-      </p:sp>
-      <p:sp>
-        <p:nvSpPr>
-          <p:cNvPr id="4" name="TextBox 3"/>
-          <p:cNvSpPr txBox="1"/>
-          <p:nvPr/>
-        </p:nvSpPr>
-        <p:spPr>
-          <a:xfrm>
-            <a:off x="457200" y="164592"/>
-            <a:ext cx="11247120" cy="731520"/>
-          </a:xfrm>
-          <a:prstGeom prst="rect">
-            <a:avLst/>
-          </a:prstGeom>
-          <a:noFill/>
-        </p:spPr>
-        <p:txBody>
-          <a:bodyPr wrap="square" anchor="ctr">
-            <a:spAutoFit/>
-          </a:bodyPr>
-          <a:lstStyle/>
-          <a:p>
-            <a:pPr algn="l"/>
-            <a:r>
-              <a:rPr sz="3000" b="1">
-                <a:solidFill>
-                  <a:srgbClr val="FFFFFF"/>
-                </a:solidFill>
-                <a:latin typeface="Segoe UI"/>
-              </a:rPr>
-              <a:t>Resultados y alcance del MVP</a:t>
-            </a:r>
-          </a:p>
-        </p:txBody>
-      </p:sp>
-      <p:sp>
-        <p:nvSpPr>
-          <p:cNvPr id="5" name="Rectangle 4"/>
-          <p:cNvSpPr/>
-          <p:nvPr/>
-        </p:nvSpPr>
-        <p:spPr>
-          <a:xfrm>
-            <a:off x="457200" y="1554480"/>
-            <a:ext cx="2651760" cy="2194560"/>
-          </a:xfrm>
-          <a:prstGeom prst="rect">
-            <a:avLst/>
-          </a:prstGeom>
-          <a:solidFill>
-            <a:srgbClr val="F4F6FA"/>
-          </a:solidFill>
-          <a:ln>
-            <a:noFill/>
-          </a:ln>
-          <a:effectLst/>
-        </p:spPr>
-        <p:style>
-          <a:lnRef idx="1">
-            <a:schemeClr val="accent1"/>
-          </a:lnRef>
-          <a:fillRef idx="3">
-            <a:schemeClr val="accent1"/>
-          </a:fillRef>
-          <a:effectRef idx="2">
-            <a:schemeClr val="accent1"/>
-          </a:effectRef>
-          <a:fontRef idx="minor">
-            <a:schemeClr val="lt1"/>
-          </a:fontRef>
-        </p:style>
-        <p:txBody>
-          <a:bodyPr rtlCol="0" anchor="ctr"/>
-          <a:lstStyle/>
-          <a:p>
-            <a:pPr algn="ctr"/>
-          </a:p>
-        </p:txBody>
-      </p:sp>
-      <p:sp>
-        <p:nvSpPr>
-          <p:cNvPr id="6" name="Rectangle 5"/>
-          <p:cNvSpPr/>
-          <p:nvPr/>
-        </p:nvSpPr>
-        <p:spPr>
-          <a:xfrm>
-            <a:off x="457200" y="1554480"/>
-            <a:ext cx="2651760" cy="73152"/>
-          </a:xfrm>
-          <a:prstGeom prst="rect">
-            <a:avLst/>
-          </a:prstGeom>
-          <a:solidFill>
-            <a:srgbClr val="1E9E6A"/>
-          </a:solidFill>
-          <a:ln>
-            <a:noFill/>
-          </a:ln>
-          <a:effectLst/>
-        </p:spPr>
-        <p:style>
-          <a:lnRef idx="1">
-            <a:schemeClr val="accent1"/>
-          </a:lnRef>
-          <a:fillRef idx="3">
-            <a:schemeClr val="accent1"/>
-          </a:fillRef>
-          <a:effectRef idx="2">
-            <a:schemeClr val="accent1"/>
-          </a:effectRef>
-          <a:fontRef idx="minor">
-            <a:schemeClr val="lt1"/>
-          </a:fontRef>
-        </p:style>
-        <p:txBody>
-          <a:bodyPr rtlCol="0" anchor="ctr"/>
-          <a:lstStyle/>
-          <a:p>
-            <a:pPr algn="ctr"/>
-          </a:p>
-        </p:txBody>
-      </p:sp>
-      <p:sp>
-        <p:nvSpPr>
-          <p:cNvPr id="7" name="TextBox 6"/>
-          <p:cNvSpPr txBox="1"/>
-          <p:nvPr/>
-        </p:nvSpPr>
-        <p:spPr>
-          <a:xfrm>
-            <a:off x="457200" y="1828800"/>
-            <a:ext cx="2651760" cy="914400"/>
-          </a:xfrm>
-          <a:prstGeom prst="rect">
-            <a:avLst/>
-          </a:prstGeom>
-          <a:noFill/>
-        </p:spPr>
-        <p:txBody>
-          <a:bodyPr wrap="square" anchor="t">
-            <a:spAutoFit/>
-          </a:bodyPr>
-          <a:lstStyle/>
-          <a:p>
-            <a:pPr algn="ctr"/>
-            <a:r>
-              <a:rPr sz="4000" b="1">
-                <a:solidFill>
-                  <a:srgbClr val="1E9E6A"/>
-                </a:solidFill>
-                <a:latin typeface="Segoe UI"/>
-              </a:rPr>
-              <a:t>122</a:t>
-            </a:r>
-          </a:p>
-        </p:txBody>
-      </p:sp>
-      <p:sp>
-        <p:nvSpPr>
-          <p:cNvPr id="8" name="TextBox 7"/>
-          <p:cNvSpPr txBox="1"/>
-          <p:nvPr/>
-        </p:nvSpPr>
-        <p:spPr>
-          <a:xfrm>
-            <a:off x="457200" y="2834640"/>
-            <a:ext cx="2651760" cy="822960"/>
-          </a:xfrm>
-          <a:prstGeom prst="rect">
-            <a:avLst/>
-          </a:prstGeom>
-          <a:noFill/>
-        </p:spPr>
-        <p:txBody>
-          <a:bodyPr wrap="square" anchor="t">
-            <a:spAutoFit/>
-          </a:bodyPr>
-          <a:lstStyle/>
-          <a:p>
-            <a:pPr algn="ctr"/>
-            <a:r>
-              <a:rPr sz="1500" b="0">
-                <a:solidFill>
-                  <a:srgbClr val="5B6678"/>
-                </a:solidFill>
-                <a:latin typeface="Segoe UI"/>
-              </a:rPr>
-              <a:t>pruebas automáticas pasan</a:t>
-            </a:r>
-          </a:p>
-        </p:txBody>
-      </p:sp>
-      <p:sp>
-        <p:nvSpPr>
-          <p:cNvPr id="9" name="Rectangle 8"/>
-          <p:cNvSpPr/>
-          <p:nvPr/>
-        </p:nvSpPr>
-        <p:spPr>
-          <a:xfrm>
-            <a:off x="3291840" y="1554480"/>
-            <a:ext cx="2651760" cy="2194560"/>
-          </a:xfrm>
-          <a:prstGeom prst="rect">
-            <a:avLst/>
-          </a:prstGeom>
-          <a:solidFill>
-            <a:srgbClr val="F4F6FA"/>
-          </a:solidFill>
-          <a:ln>
-            <a:noFill/>
-          </a:ln>
-          <a:effectLst/>
-        </p:spPr>
-        <p:style>
-          <a:lnRef idx="1">
-            <a:schemeClr val="accent1"/>
-          </a:lnRef>
-          <a:fillRef idx="3">
-            <a:schemeClr val="accent1"/>
-          </a:fillRef>
-          <a:effectRef idx="2">
-            <a:schemeClr val="accent1"/>
-          </a:effectRef>
-          <a:fontRef idx="minor">
-            <a:schemeClr val="lt1"/>
-          </a:fontRef>
-        </p:style>
-        <p:txBody>
-          <a:bodyPr rtlCol="0" anchor="ctr"/>
-          <a:lstStyle/>
-          <a:p>
-            <a:pPr algn="ctr"/>
-          </a:p>
-        </p:txBody>
-      </p:sp>
-      <p:sp>
-        <p:nvSpPr>
-          <p:cNvPr id="10" name="Rectangle 9"/>
-          <p:cNvSpPr/>
-          <p:nvPr/>
-        </p:nvSpPr>
-        <p:spPr>
-          <a:xfrm>
-            <a:off x="3291840" y="1554480"/>
-            <a:ext cx="2651760" cy="73152"/>
-          </a:xfrm>
-          <a:prstGeom prst="rect">
-            <a:avLst/>
-          </a:prstGeom>
-          <a:solidFill>
-            <a:srgbClr val="1E9E6A"/>
-          </a:solidFill>
-          <a:ln>
-            <a:noFill/>
-          </a:ln>
-          <a:effectLst/>
-        </p:spPr>
-        <p:style>
-          <a:lnRef idx="1">
-            <a:schemeClr val="accent1"/>
-          </a:lnRef>
-          <a:fillRef idx="3">
-            <a:schemeClr val="accent1"/>
-          </a:fillRef>
-          <a:effectRef idx="2">
-            <a:schemeClr val="accent1"/>
-          </a:effectRef>
-          <a:fontRef idx="minor">
-            <a:schemeClr val="lt1"/>
-          </a:fontRef>
-        </p:style>
-        <p:txBody>
-          <a:bodyPr rtlCol="0" anchor="ctr"/>
-          <a:lstStyle/>
-          <a:p>
-            <a:pPr algn="ctr"/>
-          </a:p>
-        </p:txBody>
-      </p:sp>
-      <p:sp>
-        <p:nvSpPr>
-          <p:cNvPr id="11" name="TextBox 10"/>
-          <p:cNvSpPr txBox="1"/>
-          <p:nvPr/>
-        </p:nvSpPr>
-        <p:spPr>
-          <a:xfrm>
-            <a:off x="3291840" y="1828800"/>
-            <a:ext cx="2651760" cy="914400"/>
-          </a:xfrm>
-          <a:prstGeom prst="rect">
-            <a:avLst/>
-          </a:prstGeom>
-          <a:noFill/>
-        </p:spPr>
-        <p:txBody>
-          <a:bodyPr wrap="square" anchor="t">
-            <a:spAutoFit/>
-          </a:bodyPr>
-          <a:lstStyle/>
-          <a:p>
-            <a:pPr algn="ctr"/>
-            <a:r>
-              <a:rPr sz="4000" b="1">
-                <a:solidFill>
-                  <a:srgbClr val="1E9E6A"/>
-                </a:solidFill>
-                <a:latin typeface="Segoe UI"/>
-              </a:rPr>
-              <a:t>98 %</a:t>
-            </a:r>
-          </a:p>
-        </p:txBody>
-      </p:sp>
-      <p:sp>
-        <p:nvSpPr>
-          <p:cNvPr id="12" name="TextBox 11"/>
-          <p:cNvSpPr txBox="1"/>
-          <p:nvPr/>
-        </p:nvSpPr>
-        <p:spPr>
-          <a:xfrm>
-            <a:off x="3291840" y="2834640"/>
-            <a:ext cx="2651760" cy="822960"/>
-          </a:xfrm>
-          <a:prstGeom prst="rect">
-            <a:avLst/>
-          </a:prstGeom>
-          <a:noFill/>
-        </p:spPr>
-        <p:txBody>
-          <a:bodyPr wrap="square" anchor="t">
-            <a:spAutoFit/>
-          </a:bodyPr>
-          <a:lstStyle/>
-          <a:p>
-            <a:pPr algn="ctr"/>
-            <a:r>
-              <a:rPr sz="1500" b="0">
-                <a:solidFill>
-                  <a:srgbClr val="5B6678"/>
-                </a:solidFill>
-                <a:latin typeface="Segoe UI"/>
-              </a:rPr>
-              <a:t>cobertura del código</a:t>
-            </a:r>
-          </a:p>
-        </p:txBody>
-      </p:sp>
-      <p:sp>
-        <p:nvSpPr>
-          <p:cNvPr id="13" name="Rectangle 12"/>
-          <p:cNvSpPr/>
-          <p:nvPr/>
-        </p:nvSpPr>
-        <p:spPr>
-          <a:xfrm>
-            <a:off x="6126480" y="1554480"/>
-            <a:ext cx="2651760" cy="2194560"/>
-          </a:xfrm>
-          <a:prstGeom prst="rect">
-            <a:avLst/>
-          </a:prstGeom>
-          <a:solidFill>
-            <a:srgbClr val="F4F6FA"/>
-          </a:solidFill>
-          <a:ln>
-            <a:noFill/>
-          </a:ln>
-          <a:effectLst/>
-        </p:spPr>
-        <p:style>
-          <a:lnRef idx="1">
-            <a:schemeClr val="accent1"/>
-          </a:lnRef>
-          <a:fillRef idx="3">
-            <a:schemeClr val="accent1"/>
-          </a:fillRef>
-          <a:effectRef idx="2">
-            <a:schemeClr val="accent1"/>
-          </a:effectRef>
-          <a:fontRef idx="minor">
-            <a:schemeClr val="lt1"/>
-          </a:fontRef>
-        </p:style>
-        <p:txBody>
-          <a:bodyPr rtlCol="0" anchor="ctr"/>
-          <a:lstStyle/>
-          <a:p>
-            <a:pPr algn="ctr"/>
-          </a:p>
-        </p:txBody>
-      </p:sp>
-      <p:sp>
-        <p:nvSpPr>
-          <p:cNvPr id="14" name="Rectangle 13"/>
-          <p:cNvSpPr/>
-          <p:nvPr/>
-        </p:nvSpPr>
-        <p:spPr>
-          <a:xfrm>
-            <a:off x="6126480" y="1554480"/>
-            <a:ext cx="2651760" cy="73152"/>
-          </a:xfrm>
-          <a:prstGeom prst="rect">
-            <a:avLst/>
-          </a:prstGeom>
-          <a:solidFill>
-            <a:srgbClr val="2D6CDF"/>
-          </a:solidFill>
-          <a:ln>
-            <a:noFill/>
-          </a:ln>
-          <a:effectLst/>
-        </p:spPr>
-        <p:style>
-          <a:lnRef idx="1">
-            <a:schemeClr val="accent1"/>
-          </a:lnRef>
-          <a:fillRef idx="3">
-            <a:schemeClr val="accent1"/>
-          </a:fillRef>
-          <a:effectRef idx="2">
-            <a:schemeClr val="accent1"/>
-          </a:effectRef>
-          <a:fontRef idx="minor">
-            <a:schemeClr val="lt1"/>
-          </a:fontRef>
-        </p:style>
-        <p:txBody>
-          <a:bodyPr rtlCol="0" anchor="ctr"/>
-          <a:lstStyle/>
-          <a:p>
-            <a:pPr algn="ctr"/>
-          </a:p>
-        </p:txBody>
-      </p:sp>
-      <p:sp>
-        <p:nvSpPr>
-          <p:cNvPr id="15" name="TextBox 14"/>
-          <p:cNvSpPr txBox="1"/>
-          <p:nvPr/>
-        </p:nvSpPr>
-        <p:spPr>
-          <a:xfrm>
-            <a:off x="6126480" y="1828800"/>
-            <a:ext cx="2651760" cy="914400"/>
-          </a:xfrm>
-          <a:prstGeom prst="rect">
-            <a:avLst/>
-          </a:prstGeom>
-          <a:noFill/>
-        </p:spPr>
-        <p:txBody>
-          <a:bodyPr wrap="square" anchor="t">
-            <a:spAutoFit/>
-          </a:bodyPr>
-          <a:lstStyle/>
-          <a:p>
-            <a:pPr algn="ctr"/>
-            <a:r>
-              <a:rPr sz="4000" b="1">
-                <a:solidFill>
-                  <a:srgbClr val="2D6CDF"/>
-                </a:solidFill>
-                <a:latin typeface="Segoe UI"/>
-              </a:rPr>
-              <a:t>5 / 5</a:t>
-            </a:r>
-          </a:p>
-        </p:txBody>
-      </p:sp>
-      <p:sp>
-        <p:nvSpPr>
-          <p:cNvPr id="16" name="TextBox 15"/>
-          <p:cNvSpPr txBox="1"/>
-          <p:nvPr/>
-        </p:nvSpPr>
-        <p:spPr>
-          <a:xfrm>
-            <a:off x="6126480" y="2834640"/>
-            <a:ext cx="2651760" cy="822960"/>
-          </a:xfrm>
-          <a:prstGeom prst="rect">
-            <a:avLst/>
-          </a:prstGeom>
-          <a:noFill/>
-        </p:spPr>
-        <p:txBody>
-          <a:bodyPr wrap="square" anchor="t">
-            <a:spAutoFit/>
-          </a:bodyPr>
-          <a:lstStyle/>
-          <a:p>
-            <a:pPr algn="ctr"/>
-            <a:r>
-              <a:rPr sz="1500" b="0">
-                <a:solidFill>
-                  <a:srgbClr val="5B6678"/>
-                </a:solidFill>
-                <a:latin typeface="Segoe UI"/>
-              </a:rPr>
-              <a:t>historias entregadas</a:t>
-            </a:r>
-          </a:p>
-        </p:txBody>
-      </p:sp>
-      <p:sp>
-        <p:nvSpPr>
-          <p:cNvPr id="17" name="Rectangle 16"/>
-          <p:cNvSpPr/>
-          <p:nvPr/>
-        </p:nvSpPr>
-        <p:spPr>
-          <a:xfrm>
-            <a:off x="8961120" y="1554480"/>
-            <a:ext cx="2651760" cy="2194560"/>
-          </a:xfrm>
-          <a:prstGeom prst="rect">
-            <a:avLst/>
-          </a:prstGeom>
-          <a:solidFill>
-            <a:srgbClr val="F4F6FA"/>
-          </a:solidFill>
-          <a:ln>
-            <a:noFill/>
-          </a:ln>
-          <a:effectLst/>
-        </p:spPr>
-        <p:style>
-          <a:lnRef idx="1">
-            <a:schemeClr val="accent1"/>
-          </a:lnRef>
-          <a:fillRef idx="3">
-            <a:schemeClr val="accent1"/>
-          </a:fillRef>
-          <a:effectRef idx="2">
-            <a:schemeClr val="accent1"/>
-          </a:effectRef>
-          <a:fontRef idx="minor">
-            <a:schemeClr val="lt1"/>
-          </a:fontRef>
-        </p:style>
-        <p:txBody>
-          <a:bodyPr rtlCol="0" anchor="ctr"/>
-          <a:lstStyle/>
-          <a:p>
-            <a:pPr algn="ctr"/>
-          </a:p>
-        </p:txBody>
-      </p:sp>
-      <p:sp>
-        <p:nvSpPr>
-          <p:cNvPr id="18" name="Rectangle 17"/>
-          <p:cNvSpPr/>
-          <p:nvPr/>
-        </p:nvSpPr>
-        <p:spPr>
-          <a:xfrm>
-            <a:off x="8961120" y="1554480"/>
-            <a:ext cx="2651760" cy="73152"/>
-          </a:xfrm>
-          <a:prstGeom prst="rect">
-            <a:avLst/>
-          </a:prstGeom>
-          <a:solidFill>
-            <a:srgbClr val="FF7A1A"/>
-          </a:solidFill>
-          <a:ln>
-            <a:noFill/>
-          </a:ln>
-          <a:effectLst/>
-        </p:spPr>
-        <p:style>
-          <a:lnRef idx="1">
-            <a:schemeClr val="accent1"/>
-          </a:lnRef>
-          <a:fillRef idx="3">
-            <a:schemeClr val="accent1"/>
-          </a:fillRef>
-          <a:effectRef idx="2">
-            <a:schemeClr val="accent1"/>
-          </a:effectRef>
-          <a:fontRef idx="minor">
-            <a:schemeClr val="lt1"/>
-          </a:fontRef>
-        </p:style>
-        <p:txBody>
-          <a:bodyPr rtlCol="0" anchor="ctr"/>
-          <a:lstStyle/>
-          <a:p>
-            <a:pPr algn="ctr"/>
-          </a:p>
-        </p:txBody>
-      </p:sp>
-      <p:sp>
-        <p:nvSpPr>
-          <p:cNvPr id="19" name="TextBox 18"/>
-          <p:cNvSpPr txBox="1"/>
-          <p:nvPr/>
-        </p:nvSpPr>
-        <p:spPr>
-          <a:xfrm>
-            <a:off x="8961120" y="1828800"/>
-            <a:ext cx="2651760" cy="914400"/>
-          </a:xfrm>
-          <a:prstGeom prst="rect">
-            <a:avLst/>
-          </a:prstGeom>
-          <a:noFill/>
-        </p:spPr>
-        <p:txBody>
-          <a:bodyPr wrap="square" anchor="t">
-            <a:spAutoFit/>
-          </a:bodyPr>
-          <a:lstStyle/>
-          <a:p>
-            <a:pPr algn="ctr"/>
-            <a:r>
-              <a:rPr sz="4000" b="1">
-                <a:solidFill>
-                  <a:srgbClr val="FF7A1A"/>
-                </a:solidFill>
-                <a:latin typeface="Segoe UI"/>
-              </a:rPr>
-              <a:t>106 / 110</a:t>
-            </a:r>
-          </a:p>
-        </p:txBody>
-      </p:sp>
-      <p:sp>
-        <p:nvSpPr>
-          <p:cNvPr id="20" name="TextBox 19"/>
-          <p:cNvSpPr txBox="1"/>
-          <p:nvPr/>
-        </p:nvSpPr>
-        <p:spPr>
-          <a:xfrm>
-            <a:off x="8961120" y="2834640"/>
-            <a:ext cx="2651760" cy="822960"/>
-          </a:xfrm>
-          <a:prstGeom prst="rect">
-            <a:avLst/>
-          </a:prstGeom>
-          <a:noFill/>
-        </p:spPr>
-        <p:txBody>
-          <a:bodyPr wrap="square" anchor="t">
-            <a:spAutoFit/>
-          </a:bodyPr>
-          <a:lstStyle/>
-          <a:p>
-            <a:pPr algn="ctr"/>
-            <a:r>
-              <a:rPr sz="1500" b="0">
-                <a:solidFill>
-                  <a:srgbClr val="5B6678"/>
-                </a:solidFill>
-                <a:latin typeface="Segoe UI"/>
-              </a:rPr>
-              <a:t>tareas completadas</a:t>
-            </a:r>
-          </a:p>
-        </p:txBody>
-      </p:sp>
-      <p:sp>
-        <p:nvSpPr>
-          <p:cNvPr id="21" name="Rectangle 20"/>
-          <p:cNvSpPr/>
-          <p:nvPr/>
-        </p:nvSpPr>
-        <p:spPr>
-          <a:xfrm>
-            <a:off x="457200" y="4114800"/>
-            <a:ext cx="5486400" cy="2194560"/>
-          </a:xfrm>
-          <a:prstGeom prst="rect">
-            <a:avLst/>
-          </a:prstGeom>
-          <a:solidFill>
-            <a:srgbClr val="F4F6FA"/>
-          </a:solidFill>
-          <a:ln>
-            <a:noFill/>
-          </a:ln>
-          <a:effectLst/>
-        </p:spPr>
-        <p:style>
-          <a:lnRef idx="1">
-            <a:schemeClr val="accent1"/>
-          </a:lnRef>
-          <a:fillRef idx="3">
-            <a:schemeClr val="accent1"/>
-          </a:fillRef>
-          <a:effectRef idx="2">
-            <a:schemeClr val="accent1"/>
-          </a:effectRef>
-          <a:fontRef idx="minor">
-            <a:schemeClr val="lt1"/>
-          </a:fontRef>
-        </p:style>
-        <p:txBody>
-          <a:bodyPr rtlCol="0" anchor="ctr"/>
-          <a:lstStyle/>
-          <a:p>
-            <a:pPr algn="ctr"/>
-          </a:p>
-        </p:txBody>
-      </p:sp>
-      <p:sp>
-        <p:nvSpPr>
-          <p:cNvPr id="22" name="Rectangle 21"/>
-          <p:cNvSpPr/>
-          <p:nvPr/>
-        </p:nvSpPr>
-        <p:spPr>
-          <a:xfrm>
-            <a:off x="457200" y="4114800"/>
-            <a:ext cx="73152" cy="2194560"/>
-          </a:xfrm>
-          <a:prstGeom prst="rect">
-            <a:avLst/>
-          </a:prstGeom>
-          <a:solidFill>
-            <a:srgbClr val="1E9E6A"/>
-          </a:solidFill>
-          <a:ln>
-            <a:noFill/>
-          </a:ln>
-          <a:effectLst/>
-        </p:spPr>
-        <p:style>
-          <a:lnRef idx="1">
-            <a:schemeClr val="accent1"/>
-          </a:lnRef>
-          <a:fillRef idx="3">
-            <a:schemeClr val="accent1"/>
-          </a:fillRef>
-          <a:effectRef idx="2">
-            <a:schemeClr val="accent1"/>
-          </a:effectRef>
-          <a:fontRef idx="minor">
-            <a:schemeClr val="lt1"/>
-          </a:fontRef>
-        </p:style>
-        <p:txBody>
-          <a:bodyPr rtlCol="0" anchor="ctr"/>
-          <a:lstStyle/>
-          <a:p>
-            <a:pPr algn="ctr"/>
-          </a:p>
-        </p:txBody>
-      </p:sp>
-      <p:sp>
-        <p:nvSpPr>
-          <p:cNvPr id="23" name="TextBox 22"/>
-          <p:cNvSpPr txBox="1"/>
-          <p:nvPr/>
-        </p:nvSpPr>
-        <p:spPr>
-          <a:xfrm>
-            <a:off x="640080" y="4187952"/>
-            <a:ext cx="5212080" cy="411480"/>
-          </a:xfrm>
-          <a:prstGeom prst="rect">
-            <a:avLst/>
-          </a:prstGeom>
-          <a:noFill/>
-        </p:spPr>
-        <p:txBody>
-          <a:bodyPr wrap="square" anchor="t">
-            <a:spAutoFit/>
-          </a:bodyPr>
-          <a:lstStyle/>
-          <a:p>
-            <a:pPr algn="l"/>
-            <a:r>
-              <a:rPr sz="1700" b="1">
-                <a:solidFill>
-                  <a:srgbClr val="0B1F3A"/>
-                </a:solidFill>
-                <a:latin typeface="Segoe UI"/>
-              </a:rPr>
-              <a:t>Dentro del MVP</a:t>
-            </a:r>
-          </a:p>
-        </p:txBody>
-      </p:sp>
-      <p:sp>
-        <p:nvSpPr>
-          <p:cNvPr id="24" name="TextBox 23"/>
-          <p:cNvSpPr txBox="1"/>
-          <p:nvPr/>
-        </p:nvSpPr>
-        <p:spPr>
-          <a:xfrm>
-            <a:off x="640080" y="4645152"/>
-            <a:ext cx="5212080" cy="1600200"/>
-          </a:xfrm>
-          <a:prstGeom prst="rect">
-            <a:avLst/>
-          </a:prstGeom>
-          <a:noFill/>
-        </p:spPr>
-        <p:txBody>
-          <a:bodyPr wrap="square" anchor="t">
-            <a:spAutoFit/>
-          </a:bodyPr>
-          <a:lstStyle/>
-          <a:p>
-            <a:pPr algn="l"/>
-            <a:r>
-              <a:rPr sz="1600" b="0">
-                <a:solidFill>
-                  <a:srgbClr val="5B6678"/>
-                </a:solidFill>
-                <a:latin typeface="Segoe UI"/>
-              </a:rPr>
-              <a:t>Consultar, conciliar y revisar</a:t>
-            </a:r>
-          </a:p>
-          <a:p>
-            <a:pPr algn="l">
-              <a:spcBef>
-                <a:spcPts val="600"/>
-              </a:spcBef>
-            </a:pPr>
-            <a:r>
-              <a:rPr sz="1600" b="0">
-                <a:solidFill>
-                  <a:srgbClr val="5B6678"/>
-                </a:solidFill>
-                <a:latin typeface="Segoe UI"/>
-              </a:rPr>
-              <a:t>Seguimiento local con roles</a:t>
-            </a:r>
-          </a:p>
-          <a:p>
-            <a:pPr algn="l">
-              <a:spcBef>
-                <a:spcPts val="600"/>
-              </a:spcBef>
-            </a:pPr>
-            <a:r>
-              <a:rPr sz="1600" b="0">
-                <a:solidFill>
-                  <a:srgbClr val="5B6678"/>
-                </a:solidFill>
-                <a:latin typeface="Segoe UI"/>
-              </a:rPr>
-              <a:t>Escenarios de prueba</a:t>
-            </a:r>
-          </a:p>
-        </p:txBody>
-      </p:sp>
-      <p:sp>
-        <p:nvSpPr>
-          <p:cNvPr id="25" name="Rectangle 24"/>
-          <p:cNvSpPr/>
-          <p:nvPr/>
-        </p:nvSpPr>
-        <p:spPr>
-          <a:xfrm>
-            <a:off x="6217920" y="4114800"/>
-            <a:ext cx="5486400" cy="2194560"/>
-          </a:xfrm>
-          <a:prstGeom prst="rect">
-            <a:avLst/>
-          </a:prstGeom>
-          <a:solidFill>
-            <a:srgbClr val="F4F6FA"/>
-          </a:solidFill>
-          <a:ln>
-            <a:noFill/>
-          </a:ln>
-          <a:effectLst/>
-        </p:spPr>
-        <p:style>
-          <a:lnRef idx="1">
-            <a:schemeClr val="accent1"/>
-          </a:lnRef>
-          <a:fillRef idx="3">
-            <a:schemeClr val="accent1"/>
-          </a:fillRef>
-          <a:effectRef idx="2">
-            <a:schemeClr val="accent1"/>
-          </a:effectRef>
-          <a:fontRef idx="minor">
-            <a:schemeClr val="lt1"/>
-          </a:fontRef>
-        </p:style>
-        <p:txBody>
-          <a:bodyPr rtlCol="0" anchor="ctr"/>
-          <a:lstStyle/>
-          <a:p>
-            <a:pPr algn="ctr"/>
-          </a:p>
-        </p:txBody>
-      </p:sp>
-      <p:sp>
-        <p:nvSpPr>
-          <p:cNvPr id="26" name="Rectangle 25"/>
-          <p:cNvSpPr/>
-          <p:nvPr/>
-        </p:nvSpPr>
-        <p:spPr>
-          <a:xfrm>
-            <a:off x="6217920" y="4114800"/>
-            <a:ext cx="73152" cy="2194560"/>
-          </a:xfrm>
-          <a:prstGeom prst="rect">
-            <a:avLst/>
-          </a:prstGeom>
-          <a:solidFill>
-            <a:srgbClr val="D64545"/>
-          </a:solidFill>
-          <a:ln>
-            <a:noFill/>
-          </a:ln>
-          <a:effectLst/>
-        </p:spPr>
-        <p:style>
-          <a:lnRef idx="1">
-            <a:schemeClr val="accent1"/>
-          </a:lnRef>
-          <a:fillRef idx="3">
-            <a:schemeClr val="accent1"/>
-          </a:fillRef>
-          <a:effectRef idx="2">
-            <a:schemeClr val="accent1"/>
-          </a:effectRef>
-          <a:fontRef idx="minor">
-            <a:schemeClr val="lt1"/>
-          </a:fontRef>
-        </p:style>
-        <p:txBody>
-          <a:bodyPr rtlCol="0" anchor="ctr"/>
-          <a:lstStyle/>
-          <a:p>
-            <a:pPr algn="ctr"/>
-          </a:p>
-        </p:txBody>
-      </p:sp>
-      <p:sp>
-        <p:nvSpPr>
-          <p:cNvPr id="27" name="TextBox 26"/>
-          <p:cNvSpPr txBox="1"/>
-          <p:nvPr/>
-        </p:nvSpPr>
-        <p:spPr>
-          <a:xfrm>
-            <a:off x="6400800" y="4187952"/>
-            <a:ext cx="5212080" cy="411480"/>
-          </a:xfrm>
-          <a:prstGeom prst="rect">
-            <a:avLst/>
-          </a:prstGeom>
-          <a:noFill/>
-        </p:spPr>
-        <p:txBody>
-          <a:bodyPr wrap="square" anchor="t">
-            <a:spAutoFit/>
-          </a:bodyPr>
-          <a:lstStyle/>
-          <a:p>
-            <a:pPr algn="l"/>
-            <a:r>
-              <a:rPr sz="1700" b="1">
-                <a:solidFill>
-                  <a:srgbClr val="0B1F3A"/>
-                </a:solidFill>
-                <a:latin typeface="Segoe UI"/>
-              </a:rPr>
-              <a:t>Simulado en la demo</a:t>
-            </a:r>
-          </a:p>
-        </p:txBody>
-      </p:sp>
-      <p:sp>
-        <p:nvSpPr>
-          <p:cNvPr id="28" name="TextBox 27"/>
-          <p:cNvSpPr txBox="1"/>
-          <p:nvPr/>
-        </p:nvSpPr>
-        <p:spPr>
-          <a:xfrm>
-            <a:off x="6400800" y="4645152"/>
-            <a:ext cx="5212080" cy="1600200"/>
-          </a:xfrm>
-          <a:prstGeom prst="rect">
-            <a:avLst/>
-          </a:prstGeom>
-          <a:noFill/>
-        </p:spPr>
-        <p:txBody>
-          <a:bodyPr wrap="square" anchor="t">
-            <a:spAutoFit/>
-          </a:bodyPr>
-          <a:lstStyle/>
-          <a:p>
-            <a:pPr algn="l"/>
-            <a:r>
-              <a:rPr sz="1600" b="0">
-                <a:solidFill>
-                  <a:srgbClr val="5B6678"/>
-                </a:solidFill>
-                <a:latin typeface="Segoe UI"/>
-              </a:rPr>
-              <a:t>El proveedor de pagos y sus datos</a:t>
-            </a:r>
-          </a:p>
-          <a:p>
-            <a:pPr algn="l">
-              <a:spcBef>
-                <a:spcPts val="600"/>
-              </a:spcBef>
-            </a:pPr>
-            <a:r>
-              <a:rPr sz="1600" b="0">
-                <a:solidFill>
-                  <a:srgbClr val="5B6678"/>
-                </a:solidFill>
-                <a:latin typeface="Segoe UI"/>
-              </a:rPr>
-              <a:t>Todos los datos son ficticios</a:t>
-            </a:r>
-          </a:p>
-          <a:p>
-            <a:pPr algn="l">
-              <a:spcBef>
-                <a:spcPts val="600"/>
-              </a:spcBef>
-            </a:pPr>
-            <a:r>
-              <a:rPr sz="1600" b="0">
-                <a:solidFill>
-                  <a:srgbClr val="5B6678"/>
-                </a:solidFill>
-                <a:latin typeface="Segoe UI"/>
-              </a:rPr>
-              <a:t>El seguimiento solo vive en el navegador</a:t>
-            </a:r>
-          </a:p>
-        </p:txBody>
-      </p:sp>
-    </p:spTree>
-  </p:cSld>
-  <p:clrMapOvr>
-    <a:masterClrMapping/>
-  </p:clrMapOvr>
-</p:sld>
-</file>
-
 <file path=ppt/slides/slide9.xml><?xml version="1.0" encoding="utf-8"?>
 <p:sld xmlns:a="http://schemas.openxmlformats.org/drawingml/2006/main" xmlns:p="http://schemas.openxmlformats.org/presentationml/2006/main" xmlns:r="http://schemas.openxmlformats.org/officeDocument/2006/relationships">
   <p:cSld>
@@ -10226,7 +10733,7 @@
                 </a:solidFill>
                 <a:latin typeface="Segoe UI"/>
               </a:rPr>
-              <a:t>Siguientes pasos</a:t>
+              <a:t>Resultados y alcance del MVP</a:t>
             </a:r>
           </a:p>
         </p:txBody>
@@ -10239,8 +10746,8 @@
         </p:nvSpPr>
         <p:spPr>
           <a:xfrm>
-            <a:off x="457200" y="1371600"/>
-            <a:ext cx="5486400" cy="4846320"/>
+            <a:off x="457200" y="1554480"/>
+            <a:ext cx="2651760" cy="2194560"/>
           </a:xfrm>
           <a:prstGeom prst="rect">
             <a:avLst/>
@@ -10283,8 +10790,482 @@
         </p:nvSpPr>
         <p:spPr>
           <a:xfrm>
-            <a:off x="457200" y="1371600"/>
-            <a:ext cx="73152" cy="4846320"/>
+            <a:off x="457200" y="1554480"/>
+            <a:ext cx="2651760" cy="73152"/>
+          </a:xfrm>
+          <a:prstGeom prst="rect">
+            <a:avLst/>
+          </a:prstGeom>
+          <a:solidFill>
+            <a:srgbClr val="1E9E6A"/>
+          </a:solidFill>
+          <a:ln>
+            <a:noFill/>
+          </a:ln>
+          <a:effectLst/>
+        </p:spPr>
+        <p:style>
+          <a:lnRef idx="1">
+            <a:schemeClr val="accent1"/>
+          </a:lnRef>
+          <a:fillRef idx="3">
+            <a:schemeClr val="accent1"/>
+          </a:fillRef>
+          <a:effectRef idx="2">
+            <a:schemeClr val="accent1"/>
+          </a:effectRef>
+          <a:fontRef idx="minor">
+            <a:schemeClr val="lt1"/>
+          </a:fontRef>
+        </p:style>
+        <p:txBody>
+          <a:bodyPr rtlCol="0" anchor="ctr"/>
+          <a:lstStyle/>
+          <a:p>
+            <a:pPr algn="ctr"/>
+          </a:p>
+        </p:txBody>
+      </p:sp>
+      <p:sp>
+        <p:nvSpPr>
+          <p:cNvPr id="7" name="TextBox 6"/>
+          <p:cNvSpPr txBox="1"/>
+          <p:nvPr/>
+        </p:nvSpPr>
+        <p:spPr>
+          <a:xfrm>
+            <a:off x="457200" y="1828800"/>
+            <a:ext cx="2651760" cy="914400"/>
+          </a:xfrm>
+          <a:prstGeom prst="rect">
+            <a:avLst/>
+          </a:prstGeom>
+          <a:noFill/>
+        </p:spPr>
+        <p:txBody>
+          <a:bodyPr wrap="square" anchor="t">
+            <a:spAutoFit/>
+          </a:bodyPr>
+          <a:lstStyle/>
+          <a:p>
+            <a:pPr algn="ctr"/>
+            <a:r>
+              <a:rPr sz="3800" b="1">
+                <a:solidFill>
+                  <a:srgbClr val="1E9E6A"/>
+                </a:solidFill>
+                <a:latin typeface="Segoe UI"/>
+              </a:rPr>
+              <a:t>267</a:t>
+            </a:r>
+          </a:p>
+        </p:txBody>
+      </p:sp>
+      <p:sp>
+        <p:nvSpPr>
+          <p:cNvPr id="8" name="TextBox 7"/>
+          <p:cNvSpPr txBox="1"/>
+          <p:nvPr/>
+        </p:nvSpPr>
+        <p:spPr>
+          <a:xfrm>
+            <a:off x="457200" y="2834640"/>
+            <a:ext cx="2651760" cy="822960"/>
+          </a:xfrm>
+          <a:prstGeom prst="rect">
+            <a:avLst/>
+          </a:prstGeom>
+          <a:noFill/>
+        </p:spPr>
+        <p:txBody>
+          <a:bodyPr wrap="square" anchor="t">
+            <a:spAutoFit/>
+          </a:bodyPr>
+          <a:lstStyle/>
+          <a:p>
+            <a:pPr algn="ctr"/>
+            <a:r>
+              <a:rPr sz="1500" b="0">
+                <a:solidFill>
+                  <a:srgbClr val="5B6678"/>
+                </a:solidFill>
+                <a:latin typeface="Segoe UI"/>
+              </a:rPr>
+              <a:t>pruebas automáticas pasan</a:t>
+            </a:r>
+          </a:p>
+        </p:txBody>
+      </p:sp>
+      <p:sp>
+        <p:nvSpPr>
+          <p:cNvPr id="9" name="Rectangle 8"/>
+          <p:cNvSpPr/>
+          <p:nvPr/>
+        </p:nvSpPr>
+        <p:spPr>
+          <a:xfrm>
+            <a:off x="3291840" y="1554480"/>
+            <a:ext cx="2651760" cy="2194560"/>
+          </a:xfrm>
+          <a:prstGeom prst="rect">
+            <a:avLst/>
+          </a:prstGeom>
+          <a:solidFill>
+            <a:srgbClr val="F4F6FA"/>
+          </a:solidFill>
+          <a:ln>
+            <a:noFill/>
+          </a:ln>
+          <a:effectLst/>
+        </p:spPr>
+        <p:style>
+          <a:lnRef idx="1">
+            <a:schemeClr val="accent1"/>
+          </a:lnRef>
+          <a:fillRef idx="3">
+            <a:schemeClr val="accent1"/>
+          </a:fillRef>
+          <a:effectRef idx="2">
+            <a:schemeClr val="accent1"/>
+          </a:effectRef>
+          <a:fontRef idx="minor">
+            <a:schemeClr val="lt1"/>
+          </a:fontRef>
+        </p:style>
+        <p:txBody>
+          <a:bodyPr rtlCol="0" anchor="ctr"/>
+          <a:lstStyle/>
+          <a:p>
+            <a:pPr algn="ctr"/>
+          </a:p>
+        </p:txBody>
+      </p:sp>
+      <p:sp>
+        <p:nvSpPr>
+          <p:cNvPr id="10" name="Rectangle 9"/>
+          <p:cNvSpPr/>
+          <p:nvPr/>
+        </p:nvSpPr>
+        <p:spPr>
+          <a:xfrm>
+            <a:off x="3291840" y="1554480"/>
+            <a:ext cx="2651760" cy="73152"/>
+          </a:xfrm>
+          <a:prstGeom prst="rect">
+            <a:avLst/>
+          </a:prstGeom>
+          <a:solidFill>
+            <a:srgbClr val="1E9E6A"/>
+          </a:solidFill>
+          <a:ln>
+            <a:noFill/>
+          </a:ln>
+          <a:effectLst/>
+        </p:spPr>
+        <p:style>
+          <a:lnRef idx="1">
+            <a:schemeClr val="accent1"/>
+          </a:lnRef>
+          <a:fillRef idx="3">
+            <a:schemeClr val="accent1"/>
+          </a:fillRef>
+          <a:effectRef idx="2">
+            <a:schemeClr val="accent1"/>
+          </a:effectRef>
+          <a:fontRef idx="minor">
+            <a:schemeClr val="lt1"/>
+          </a:fontRef>
+        </p:style>
+        <p:txBody>
+          <a:bodyPr rtlCol="0" anchor="ctr"/>
+          <a:lstStyle/>
+          <a:p>
+            <a:pPr algn="ctr"/>
+          </a:p>
+        </p:txBody>
+      </p:sp>
+      <p:sp>
+        <p:nvSpPr>
+          <p:cNvPr id="11" name="TextBox 10"/>
+          <p:cNvSpPr txBox="1"/>
+          <p:nvPr/>
+        </p:nvSpPr>
+        <p:spPr>
+          <a:xfrm>
+            <a:off x="3291840" y="1828800"/>
+            <a:ext cx="2651760" cy="914400"/>
+          </a:xfrm>
+          <a:prstGeom prst="rect">
+            <a:avLst/>
+          </a:prstGeom>
+          <a:noFill/>
+        </p:spPr>
+        <p:txBody>
+          <a:bodyPr wrap="square" anchor="t">
+            <a:spAutoFit/>
+          </a:bodyPr>
+          <a:lstStyle/>
+          <a:p>
+            <a:pPr algn="ctr"/>
+            <a:r>
+              <a:rPr sz="3800" b="1">
+                <a:solidFill>
+                  <a:srgbClr val="1E9E6A"/>
+                </a:solidFill>
+                <a:latin typeface="Segoe UI"/>
+              </a:rPr>
+              <a:t>98 – 99 %</a:t>
+            </a:r>
+          </a:p>
+        </p:txBody>
+      </p:sp>
+      <p:sp>
+        <p:nvSpPr>
+          <p:cNvPr id="12" name="TextBox 11"/>
+          <p:cNvSpPr txBox="1"/>
+          <p:nvPr/>
+        </p:nvSpPr>
+        <p:spPr>
+          <a:xfrm>
+            <a:off x="3291840" y="2834640"/>
+            <a:ext cx="2651760" cy="822960"/>
+          </a:xfrm>
+          <a:prstGeom prst="rect">
+            <a:avLst/>
+          </a:prstGeom>
+          <a:noFill/>
+        </p:spPr>
+        <p:txBody>
+          <a:bodyPr wrap="square" anchor="t">
+            <a:spAutoFit/>
+          </a:bodyPr>
+          <a:lstStyle/>
+          <a:p>
+            <a:pPr algn="ctr"/>
+            <a:r>
+              <a:rPr sz="1500" b="0">
+                <a:solidFill>
+                  <a:srgbClr val="5B6678"/>
+                </a:solidFill>
+                <a:latin typeface="Segoe UI"/>
+              </a:rPr>
+              <a:t>cobertura del código</a:t>
+            </a:r>
+          </a:p>
+        </p:txBody>
+      </p:sp>
+      <p:sp>
+        <p:nvSpPr>
+          <p:cNvPr id="13" name="Rectangle 12"/>
+          <p:cNvSpPr/>
+          <p:nvPr/>
+        </p:nvSpPr>
+        <p:spPr>
+          <a:xfrm>
+            <a:off x="6126480" y="1554480"/>
+            <a:ext cx="2651760" cy="2194560"/>
+          </a:xfrm>
+          <a:prstGeom prst="rect">
+            <a:avLst/>
+          </a:prstGeom>
+          <a:solidFill>
+            <a:srgbClr val="F4F6FA"/>
+          </a:solidFill>
+          <a:ln>
+            <a:noFill/>
+          </a:ln>
+          <a:effectLst/>
+        </p:spPr>
+        <p:style>
+          <a:lnRef idx="1">
+            <a:schemeClr val="accent1"/>
+          </a:lnRef>
+          <a:fillRef idx="3">
+            <a:schemeClr val="accent1"/>
+          </a:fillRef>
+          <a:effectRef idx="2">
+            <a:schemeClr val="accent1"/>
+          </a:effectRef>
+          <a:fontRef idx="minor">
+            <a:schemeClr val="lt1"/>
+          </a:fontRef>
+        </p:style>
+        <p:txBody>
+          <a:bodyPr rtlCol="0" anchor="ctr"/>
+          <a:lstStyle/>
+          <a:p>
+            <a:pPr algn="ctr"/>
+          </a:p>
+        </p:txBody>
+      </p:sp>
+      <p:sp>
+        <p:nvSpPr>
+          <p:cNvPr id="14" name="Rectangle 13"/>
+          <p:cNvSpPr/>
+          <p:nvPr/>
+        </p:nvSpPr>
+        <p:spPr>
+          <a:xfrm>
+            <a:off x="6126480" y="1554480"/>
+            <a:ext cx="2651760" cy="73152"/>
+          </a:xfrm>
+          <a:prstGeom prst="rect">
+            <a:avLst/>
+          </a:prstGeom>
+          <a:solidFill>
+            <a:srgbClr val="2D6CDF"/>
+          </a:solidFill>
+          <a:ln>
+            <a:noFill/>
+          </a:ln>
+          <a:effectLst/>
+        </p:spPr>
+        <p:style>
+          <a:lnRef idx="1">
+            <a:schemeClr val="accent1"/>
+          </a:lnRef>
+          <a:fillRef idx="3">
+            <a:schemeClr val="accent1"/>
+          </a:fillRef>
+          <a:effectRef idx="2">
+            <a:schemeClr val="accent1"/>
+          </a:effectRef>
+          <a:fontRef idx="minor">
+            <a:schemeClr val="lt1"/>
+          </a:fontRef>
+        </p:style>
+        <p:txBody>
+          <a:bodyPr rtlCol="0" anchor="ctr"/>
+          <a:lstStyle/>
+          <a:p>
+            <a:pPr algn="ctr"/>
+          </a:p>
+        </p:txBody>
+      </p:sp>
+      <p:sp>
+        <p:nvSpPr>
+          <p:cNvPr id="15" name="TextBox 14"/>
+          <p:cNvSpPr txBox="1"/>
+          <p:nvPr/>
+        </p:nvSpPr>
+        <p:spPr>
+          <a:xfrm>
+            <a:off x="6126480" y="1828800"/>
+            <a:ext cx="2651760" cy="914400"/>
+          </a:xfrm>
+          <a:prstGeom prst="rect">
+            <a:avLst/>
+          </a:prstGeom>
+          <a:noFill/>
+        </p:spPr>
+        <p:txBody>
+          <a:bodyPr wrap="square" anchor="t">
+            <a:spAutoFit/>
+          </a:bodyPr>
+          <a:lstStyle/>
+          <a:p>
+            <a:pPr algn="ctr"/>
+            <a:r>
+              <a:rPr sz="3800" b="1">
+                <a:solidFill>
+                  <a:srgbClr val="2D6CDF"/>
+                </a:solidFill>
+                <a:latin typeface="Segoe UI"/>
+              </a:rPr>
+              <a:t>6 / 6</a:t>
+            </a:r>
+          </a:p>
+        </p:txBody>
+      </p:sp>
+      <p:sp>
+        <p:nvSpPr>
+          <p:cNvPr id="16" name="TextBox 15"/>
+          <p:cNvSpPr txBox="1"/>
+          <p:nvPr/>
+        </p:nvSpPr>
+        <p:spPr>
+          <a:xfrm>
+            <a:off x="6126480" y="2834640"/>
+            <a:ext cx="2651760" cy="822960"/>
+          </a:xfrm>
+          <a:prstGeom prst="rect">
+            <a:avLst/>
+          </a:prstGeom>
+          <a:noFill/>
+        </p:spPr>
+        <p:txBody>
+          <a:bodyPr wrap="square" anchor="t">
+            <a:spAutoFit/>
+          </a:bodyPr>
+          <a:lstStyle/>
+          <a:p>
+            <a:pPr algn="ctr"/>
+            <a:r>
+              <a:rPr sz="1500" b="0">
+                <a:solidFill>
+                  <a:srgbClr val="5B6678"/>
+                </a:solidFill>
+                <a:latin typeface="Segoe UI"/>
+              </a:rPr>
+              <a:t>historias entregadas</a:t>
+            </a:r>
+          </a:p>
+        </p:txBody>
+      </p:sp>
+      <p:sp>
+        <p:nvSpPr>
+          <p:cNvPr id="17" name="Rectangle 16"/>
+          <p:cNvSpPr/>
+          <p:nvPr/>
+        </p:nvSpPr>
+        <p:spPr>
+          <a:xfrm>
+            <a:off x="8961120" y="1554480"/>
+            <a:ext cx="2651760" cy="2194560"/>
+          </a:xfrm>
+          <a:prstGeom prst="rect">
+            <a:avLst/>
+          </a:prstGeom>
+          <a:solidFill>
+            <a:srgbClr val="F4F6FA"/>
+          </a:solidFill>
+          <a:ln>
+            <a:noFill/>
+          </a:ln>
+          <a:effectLst/>
+        </p:spPr>
+        <p:style>
+          <a:lnRef idx="1">
+            <a:schemeClr val="accent1"/>
+          </a:lnRef>
+          <a:fillRef idx="3">
+            <a:schemeClr val="accent1"/>
+          </a:fillRef>
+          <a:effectRef idx="2">
+            <a:schemeClr val="accent1"/>
+          </a:effectRef>
+          <a:fontRef idx="minor">
+            <a:schemeClr val="lt1"/>
+          </a:fontRef>
+        </p:style>
+        <p:txBody>
+          <a:bodyPr rtlCol="0" anchor="ctr"/>
+          <a:lstStyle/>
+          <a:p>
+            <a:pPr algn="ctr"/>
+          </a:p>
+        </p:txBody>
+      </p:sp>
+      <p:sp>
+        <p:nvSpPr>
+          <p:cNvPr id="18" name="Rectangle 17"/>
+          <p:cNvSpPr/>
+          <p:nvPr/>
+        </p:nvSpPr>
+        <p:spPr>
+          <a:xfrm>
+            <a:off x="8961120" y="1554480"/>
+            <a:ext cx="2651760" cy="73152"/>
           </a:xfrm>
           <a:prstGeom prst="rect">
             <a:avLst/>
@@ -10321,14 +11302,14 @@
       </p:sp>
       <p:sp>
         <p:nvSpPr>
-          <p:cNvPr id="7" name="TextBox 6"/>
+          <p:cNvPr id="19" name="TextBox 18"/>
           <p:cNvSpPr txBox="1"/>
           <p:nvPr/>
         </p:nvSpPr>
         <p:spPr>
           <a:xfrm>
-            <a:off x="640080" y="1444752"/>
-            <a:ext cx="5212080" cy="411480"/>
+            <a:off x="8961120" y="1828800"/>
+            <a:ext cx="2651760" cy="914400"/>
           </a:xfrm>
           <a:prstGeom prst="rect">
             <a:avLst/>
@@ -10341,29 +11322,29 @@
           </a:bodyPr>
           <a:lstStyle/>
           <a:p>
-            <a:pPr algn="l"/>
-            <a:r>
-              <a:rPr sz="1700" b="1">
-                <a:solidFill>
-                  <a:srgbClr val="0B1F3A"/>
+            <a:pPr algn="ctr"/>
+            <a:r>
+              <a:rPr sz="3800" b="1">
+                <a:solidFill>
+                  <a:srgbClr val="FF7A1A"/>
                 </a:solidFill>
                 <a:latin typeface="Segoe UI"/>
               </a:rPr>
-              <a:t>Para llevarlo más lejos</a:t>
-            </a:r>
-          </a:p>
-        </p:txBody>
-      </p:sp>
-      <p:sp>
-        <p:nvSpPr>
-          <p:cNvPr id="8" name="TextBox 7"/>
+              <a:t>126 / 131</a:t>
+            </a:r>
+          </a:p>
+        </p:txBody>
+      </p:sp>
+      <p:sp>
+        <p:nvSpPr>
+          <p:cNvPr id="20" name="TextBox 19"/>
           <p:cNvSpPr txBox="1"/>
           <p:nvPr/>
         </p:nvSpPr>
         <p:spPr>
           <a:xfrm>
-            <a:off x="640080" y="1901952"/>
-            <a:ext cx="5212080" cy="4251959"/>
+            <a:off x="8961120" y="2834640"/>
+            <a:ext cx="2651760" cy="822960"/>
           </a:xfrm>
           <a:prstGeom prst="rect">
             <a:avLst/>
@@ -10376,61 +11357,29 @@
           </a:bodyPr>
           <a:lstStyle/>
           <a:p>
-            <a:pPr algn="l"/>
-            <a:r>
-              <a:rPr sz="1700" b="0">
+            <a:pPr algn="ctr"/>
+            <a:r>
+              <a:rPr sz="1500" b="0">
                 <a:solidFill>
                   <a:srgbClr val="5B6678"/>
                 </a:solidFill>
                 <a:latin typeface="Segoe UI"/>
               </a:rPr>
-              <a:t>Crear wallets y pagos desde la aplicación.</a:t>
-            </a:r>
-          </a:p>
-          <a:p>
-            <a:pPr algn="l">
-              <a:spcBef>
-                <a:spcPts val="600"/>
-              </a:spcBef>
-            </a:pPr>
-            <a:r>
-              <a:rPr sz="1700" b="0">
-                <a:solidFill>
-                  <a:srgbClr val="5B6678"/>
-                </a:solidFill>
-                <a:latin typeface="Segoe UI"/>
-              </a:rPr>
-              <a:t>Guardar el seguimiento de incidencias en un sistema real.</a:t>
-            </a:r>
-          </a:p>
-          <a:p>
-            <a:pPr algn="l">
-              <a:spcBef>
-                <a:spcPts val="600"/>
-              </a:spcBef>
-            </a:pPr>
-            <a:r>
-              <a:rPr sz="1700" b="0">
-                <a:solidFill>
-                  <a:srgbClr val="5B6678"/>
-                </a:solidFill>
-                <a:latin typeface="Segoe UI"/>
-              </a:rPr>
-              <a:t>Ensayar el flujo completo en el navegador con el equipo.</a:t>
-            </a:r>
-          </a:p>
-        </p:txBody>
-      </p:sp>
-      <p:sp>
-        <p:nvSpPr>
-          <p:cNvPr id="9" name="Rectangle 8"/>
+              <a:t>tareas completadas</a:t>
+            </a:r>
+          </a:p>
+        </p:txBody>
+      </p:sp>
+      <p:sp>
+        <p:nvSpPr>
+          <p:cNvPr id="21" name="Rectangle 20"/>
           <p:cNvSpPr/>
           <p:nvPr/>
         </p:nvSpPr>
         <p:spPr>
           <a:xfrm>
-            <a:off x="6217920" y="1371600"/>
-            <a:ext cx="5486400" cy="4846320"/>
+            <a:off x="457200" y="4114800"/>
+            <a:ext cx="5486400" cy="2194560"/>
           </a:xfrm>
           <a:prstGeom prst="rect">
             <a:avLst/>
@@ -10467,20 +11416,20 @@
       </p:sp>
       <p:sp>
         <p:nvSpPr>
-          <p:cNvPr id="10" name="Rectangle 9"/>
+          <p:cNvPr id="22" name="Rectangle 21"/>
           <p:cNvSpPr/>
           <p:nvPr/>
         </p:nvSpPr>
         <p:spPr>
           <a:xfrm>
-            <a:off x="6217920" y="1371600"/>
-            <a:ext cx="73152" cy="4846320"/>
+            <a:off x="457200" y="4114800"/>
+            <a:ext cx="73152" cy="2194560"/>
           </a:xfrm>
           <a:prstGeom prst="rect">
             <a:avLst/>
           </a:prstGeom>
           <a:solidFill>
-            <a:srgbClr val="2D6CDF"/>
+            <a:srgbClr val="1E9E6A"/>
           </a:solidFill>
           <a:ln>
             <a:noFill/>
@@ -10511,13 +11460,13 @@
       </p:sp>
       <p:sp>
         <p:nvSpPr>
-          <p:cNvPr id="11" name="TextBox 10"/>
+          <p:cNvPr id="23" name="TextBox 22"/>
           <p:cNvSpPr txBox="1"/>
           <p:nvPr/>
         </p:nvSpPr>
         <p:spPr>
           <a:xfrm>
-            <a:off x="6400800" y="1444752"/>
+            <a:off x="640080" y="4187952"/>
             <a:ext cx="5212080" cy="411480"/>
           </a:xfrm>
           <a:prstGeom prst="rect">
@@ -10539,21 +11488,21 @@
                 </a:solidFill>
                 <a:latin typeface="Segoe UI"/>
               </a:rPr>
-              <a:t>Lo que mostramos hoy</a:t>
-            </a:r>
-          </a:p>
-        </p:txBody>
-      </p:sp>
-      <p:sp>
-        <p:nvSpPr>
-          <p:cNvPr id="12" name="TextBox 11"/>
+              <a:t>Dentro del MVP</a:t>
+            </a:r>
+          </a:p>
+        </p:txBody>
+      </p:sp>
+      <p:sp>
+        <p:nvSpPr>
+          <p:cNvPr id="24" name="TextBox 23"/>
           <p:cNvSpPr txBox="1"/>
           <p:nvPr/>
         </p:nvSpPr>
         <p:spPr>
           <a:xfrm>
-            <a:off x="6400800" y="1901952"/>
-            <a:ext cx="5212080" cy="4251959"/>
+            <a:off x="640080" y="4645152"/>
+            <a:ext cx="5212080" cy="1600200"/>
           </a:xfrm>
           <a:prstGeom prst="rect">
             <a:avLst/>
@@ -10568,13 +11517,13 @@
           <a:p>
             <a:pPr algn="l"/>
             <a:r>
-              <a:rPr sz="1700" b="0">
+              <a:rPr sz="1500" b="0">
                 <a:solidFill>
                   <a:srgbClr val="5B6678"/>
                 </a:solidFill>
                 <a:latin typeface="Segoe UI"/>
               </a:rPr>
-              <a:t>El problema y su impacto en operaciones.</a:t>
+              <a:t>Consultar, conciliar y revisar</a:t>
             </a:r>
           </a:p>
           <a:p>
@@ -10584,13 +11533,13 @@
               </a:spcBef>
             </a:pPr>
             <a:r>
-              <a:rPr sz="1700" b="0">
+              <a:rPr sz="1500" b="0">
                 <a:solidFill>
                   <a:srgbClr val="5B6678"/>
                 </a:solidFill>
                 <a:latin typeface="Segoe UI"/>
               </a:rPr>
-              <a:t>Un flujo MVP completo, de la carga al cierre.</a:t>
+              <a:t>Seguimiento con roles Analista y Supervisor</a:t>
             </a:r>
           </a:p>
           <a:p>
@@ -10600,13 +11549,219 @@
               </a:spcBef>
             </a:pPr>
             <a:r>
-              <a:rPr sz="1700" b="0">
+              <a:rPr sz="1500" b="0">
                 <a:solidFill>
                   <a:srgbClr val="5B6678"/>
                 </a:solidFill>
                 <a:latin typeface="Segoe UI"/>
               </a:rPr>
-              <a:t>Un método con specs, pruebas y revisión humana.</a:t>
+              <a:t>Mensaje de IA para el supervisor</a:t>
+            </a:r>
+          </a:p>
+          <a:p>
+            <a:pPr algn="l">
+              <a:spcBef>
+                <a:spcPts val="600"/>
+              </a:spcBef>
+            </a:pPr>
+            <a:r>
+              <a:rPr sz="1500" b="0">
+                <a:solidFill>
+                  <a:srgbClr val="5B6678"/>
+                </a:solidFill>
+                <a:latin typeface="Segoe UI"/>
+              </a:rPr>
+              <a:t>Escenarios de prueba</a:t>
+            </a:r>
+          </a:p>
+        </p:txBody>
+      </p:sp>
+      <p:sp>
+        <p:nvSpPr>
+          <p:cNvPr id="25" name="Rectangle 24"/>
+          <p:cNvSpPr/>
+          <p:nvPr/>
+        </p:nvSpPr>
+        <p:spPr>
+          <a:xfrm>
+            <a:off x="6217920" y="4114800"/>
+            <a:ext cx="5486400" cy="2194560"/>
+          </a:xfrm>
+          <a:prstGeom prst="rect">
+            <a:avLst/>
+          </a:prstGeom>
+          <a:solidFill>
+            <a:srgbClr val="F4F6FA"/>
+          </a:solidFill>
+          <a:ln>
+            <a:noFill/>
+          </a:ln>
+          <a:effectLst/>
+        </p:spPr>
+        <p:style>
+          <a:lnRef idx="1">
+            <a:schemeClr val="accent1"/>
+          </a:lnRef>
+          <a:fillRef idx="3">
+            <a:schemeClr val="accent1"/>
+          </a:fillRef>
+          <a:effectRef idx="2">
+            <a:schemeClr val="accent1"/>
+          </a:effectRef>
+          <a:fontRef idx="minor">
+            <a:schemeClr val="lt1"/>
+          </a:fontRef>
+        </p:style>
+        <p:txBody>
+          <a:bodyPr rtlCol="0" anchor="ctr"/>
+          <a:lstStyle/>
+          <a:p>
+            <a:pPr algn="ctr"/>
+          </a:p>
+        </p:txBody>
+      </p:sp>
+      <p:sp>
+        <p:nvSpPr>
+          <p:cNvPr id="26" name="Rectangle 25"/>
+          <p:cNvSpPr/>
+          <p:nvPr/>
+        </p:nvSpPr>
+        <p:spPr>
+          <a:xfrm>
+            <a:off x="6217920" y="4114800"/>
+            <a:ext cx="73152" cy="2194560"/>
+          </a:xfrm>
+          <a:prstGeom prst="rect">
+            <a:avLst/>
+          </a:prstGeom>
+          <a:solidFill>
+            <a:srgbClr val="D64545"/>
+          </a:solidFill>
+          <a:ln>
+            <a:noFill/>
+          </a:ln>
+          <a:effectLst/>
+        </p:spPr>
+        <p:style>
+          <a:lnRef idx="1">
+            <a:schemeClr val="accent1"/>
+          </a:lnRef>
+          <a:fillRef idx="3">
+            <a:schemeClr val="accent1"/>
+          </a:fillRef>
+          <a:effectRef idx="2">
+            <a:schemeClr val="accent1"/>
+          </a:effectRef>
+          <a:fontRef idx="minor">
+            <a:schemeClr val="lt1"/>
+          </a:fontRef>
+        </p:style>
+        <p:txBody>
+          <a:bodyPr rtlCol="0" anchor="ctr"/>
+          <a:lstStyle/>
+          <a:p>
+            <a:pPr algn="ctr"/>
+          </a:p>
+        </p:txBody>
+      </p:sp>
+      <p:sp>
+        <p:nvSpPr>
+          <p:cNvPr id="27" name="TextBox 26"/>
+          <p:cNvSpPr txBox="1"/>
+          <p:nvPr/>
+        </p:nvSpPr>
+        <p:spPr>
+          <a:xfrm>
+            <a:off x="6400800" y="4187952"/>
+            <a:ext cx="5212080" cy="411480"/>
+          </a:xfrm>
+          <a:prstGeom prst="rect">
+            <a:avLst/>
+          </a:prstGeom>
+          <a:noFill/>
+        </p:spPr>
+        <p:txBody>
+          <a:bodyPr wrap="square" anchor="t">
+            <a:spAutoFit/>
+          </a:bodyPr>
+          <a:lstStyle/>
+          <a:p>
+            <a:pPr algn="l"/>
+            <a:r>
+              <a:rPr sz="1700" b="1">
+                <a:solidFill>
+                  <a:srgbClr val="0B1F3A"/>
+                </a:solidFill>
+                <a:latin typeface="Segoe UI"/>
+              </a:rPr>
+              <a:t>Simulado o de apoyo</a:t>
+            </a:r>
+          </a:p>
+        </p:txBody>
+      </p:sp>
+      <p:sp>
+        <p:nvSpPr>
+          <p:cNvPr id="28" name="TextBox 27"/>
+          <p:cNvSpPr txBox="1"/>
+          <p:nvPr/>
+        </p:nvSpPr>
+        <p:spPr>
+          <a:xfrm>
+            <a:off x="6400800" y="4645152"/>
+            <a:ext cx="5212080" cy="1600200"/>
+          </a:xfrm>
+          <a:prstGeom prst="rect">
+            <a:avLst/>
+          </a:prstGeom>
+          <a:noFill/>
+        </p:spPr>
+        <p:txBody>
+          <a:bodyPr wrap="square" anchor="t">
+            <a:spAutoFit/>
+          </a:bodyPr>
+          <a:lstStyle/>
+          <a:p>
+            <a:pPr algn="l"/>
+            <a:r>
+              <a:rPr sz="1500" b="0">
+                <a:solidFill>
+                  <a:srgbClr val="5B6678"/>
+                </a:solidFill>
+                <a:latin typeface="Segoe UI"/>
+              </a:rPr>
+              <a:t>El proveedor de pagos y sus datos son ficticios</a:t>
+            </a:r>
+          </a:p>
+          <a:p>
+            <a:pPr algn="l">
+              <a:spcBef>
+                <a:spcPts val="600"/>
+              </a:spcBef>
+            </a:pPr>
+            <a:r>
+              <a:rPr sz="1500" b="0">
+                <a:solidFill>
+                  <a:srgbClr val="5B6678"/>
+                </a:solidFill>
+                <a:latin typeface="Segoe UI"/>
+              </a:rPr>
+              <a:t>El seguimiento solo vive en el navegador</a:t>
+            </a:r>
+          </a:p>
+          <a:p>
+            <a:pPr algn="l">
+              <a:spcBef>
+                <a:spcPts val="600"/>
+              </a:spcBef>
+            </a:pPr>
+            <a:r>
+              <a:rPr sz="1500" b="0">
+                <a:solidFill>
+                  <a:srgbClr val="5B6678"/>
+                </a:solidFill>
+                <a:latin typeface="Segoe UI"/>
+              </a:rPr>
+              <a:t>El mensaje de IA apoya; el supervisor decide</a:t>
             </a:r>
           </a:p>
         </p:txBody>
